--- a/presentations/hr-driven-identity-interview/HR_Driven_Identity_Contractor_Source_AnyAgency_Narrated.pptx
+++ b/presentations/hr-driven-identity-interview/HR_Driven_Identity_Contractor_Source_AnyAgency_Narrated.pptx
@@ -113,25 +113,25 @@
   <p:extLst>
     <p:ext uri="{521415D9-36F7-43E2-AB2F-B90AF26B5E84}">
       <p14:sectionLst xmlns:p14="http://schemas.microsoft.com/office/powerpoint/2010/main">
-        <p14:section name="Question" id="{DEE6256C-2413-05BD-F673-436907860122}">
+        <p14:section name="Question" id="{91176A99-C8A7-FADB-A1F1-CE6CE953CF29}">
           <p14:sldIdLst>
             <p14:sldId id="256"/>
             <p14:sldId id="257"/>
           </p14:sldIdLst>
         </p14:section>
-        <p14:section name="Options" id="{C011B7A5-91E8-24E9-EA63-5B3062F51204}">
+        <p14:section name="Options" id="{3B1F1646-2DC6-1D16-0854-85814B3D61DD}">
           <p14:sldIdLst>
             <p14:sldId id="258"/>
             <p14:sldId id="259"/>
           </p14:sldIdLst>
         </p14:section>
-        <p14:section name="Position" id="{7E3E94FA-82F8-859D-7D76-CCD4C27594A9}">
+        <p14:section name="Position" id="{71055F10-FC87-A86F-25D7-59A147A4C7CE}">
           <p14:sldIdLst>
             <p14:sldId id="260"/>
             <p14:sldId id="261"/>
           </p14:sldIdLst>
         </p14:section>
-        <p14:section name="Sequence" id="{81A783C1-DF6C-1BB6-DE95-1BE9E220EBC2}">
+        <p14:section name="Sequence" id="{08D8D70D-7030-7AB7-D43F-041234203295}">
           <p14:sldIdLst>
             <p14:sldId id="262"/>
           </p14:sldIdLst>
@@ -170,7 +170,7 @@
     </p:spTree>
     <p:extLst>
       <p:ext uri="{BB962C8B-B14F-4D97-AF65-F5344CB8AC3E}">
-        <p14:creationId xmlns:p14="http://schemas.microsoft.com/office/powerpoint/2010/main" val="229001567"/>
+        <p14:creationId xmlns:p14="http://schemas.microsoft.com/office/powerpoint/2010/main" val="3671036344"/>
       </p:ext>
     </p:extLst>
   </p:cSld>
@@ -317,8 +317,8 @@
             <a:r>
               <a:rPr lang="en-US" dirty="0"/>
               <a:t>[Backup deck. Not presented in the 15-minute interview. Use it if the panel asks about contractors, or leave it behind.]
-The interview deck makes one honest limit explicit: HRIT covers federal employees only, so a contractor authority decision is required. In the processes I have observed, contractors are tracked in COR spreadsheets. This companion goes one step further. It asks which record should be authoritative for a contractor, and it adds an option the main deck doesn't name: the agency's contractor suitability register.
-The one-sentence version: don't wait for one contractor feed. Most agencies already hold three contractor records. Give each fact one authority, and hang the whole record on an accountable federal sponsor.</a:t>
+The interview deck makes one honest limit explicit: published Federal HR 2.0 scope centers on the federal employee lifecycle, so a contractor authority decision is required. In the processes I have observed, contractors are tracked in COR spreadsheets. This companion goes one step further. It asks which record should be authoritative for a contractor, and it adds an option the main deck doesn't name: the agency's contractor suitability register.
+The one-sentence version: don't wait for one contractor feed. Most agencies maintain contractor information in several operational contexts. Evaluate them as candidate authorities, give each fact one authority, and hang the record on an accountable federal sponsor.</a:t>
             </a:r>
           </a:p>
         </p:txBody>
@@ -406,9 +406,9 @@
             <a:r>
               <a:rPr lang="en-US" dirty="0"/>
               <a:t>Three facts that don't fit together.
-First, scope. The Federal HR 2.0 memo of December 10, 2025 scopes Core HCM to personnel action processing, the employee system of record and the federal employee lifecycle. The June 2026 Oracle award covers civilian employees. Neither mentions contractors. Oracle Fusion HCM can hold contingent workers as a product, but the program doesn't commit to it.
+First, scope. The Federal HR 2.0 memo of December 10, 2025 scopes Core HCM to personnel action processing, the employee system of record and the federal employee lifecycle. The June 2026 Oracle award covers civilian employees. Neither establishes contractor treatment in the sources reviewed. Oracle Fusion HCM can hold contingent workers as a product, but the program doesn't commit to it.
 Second, what I have observed. In the processes I have observed, contractors are tracked in COR spreadsheets, and many of their accounts come from tickets. Based on current visibility, nothing authoritative tells identity that a contractor's engagement has ended.
-Third, guidance. GSA's ILM Playbook says the HR or personnel system is the sole driver of identity creation and termination, and CDM's master user record must include contractors. But the HR system won't carry them. Something else has to be the authority, and it needs the same rigor as the HR record.
+Third, guidance. Federal lifecycle guidance, including GSA's ILM Playbook, calls for an authoritative personnel source for identity creation and termination, and CDM's master user record must include contractors. Employee HR may not carry them, so contractors need an equivalent authoritative personnel source. Something else has to be the authority, and it needs the same rigor as the HR record.
 Sources: OMB/OPM, Creating Federal HR 2.0 (2025-12-10); GSA ILM Playbook v2.0; FIPS 201-3 and OMB M-19-17 cover employees and contractors; NIST SP 800-53 PS-7 (external personnel security).</a:t>
             </a:r>
           </a:p>
@@ -496,10 +496,10 @@
           <a:p>
             <a:r>
               <a:rPr lang="en-US" dirty="0"/>
-              <a:t>The useful finding: most agencies aren't starting from zero. There are usually three contractor records already.
+              <a:t>The useful finding: most agencies aren't starting from zero. Contractor information usually appears in several operational contexts.
 COR spreadsheets: real, but kept per COR, with no common format or timing. They're evidence, not a source.
-The contractor suitability register: many agencies keep one, under personnel security or contracting. It holds the contractors working on agency contracts, with the suitability determination and its date. That is often the one record that already ties a person to a contract under agency authority.
-PIV enrollment: the credentialing system enrolls employees, contractors and other personnel. It covers identity proofing and background-investigation workflows, and the card management system issues the credential.
+The contractor suitability register: many agencies keep one, under personnel security or contracting. It typically holds contractors working on agency contracts, with the suitability determination and its date. Its coverage, contract identifiers, lifecycle fields, owner, interface and update cadence require validation.
+PIV enrollment: the credentialing system enrolls employees, contractors and other personnel. It covers identity proofing and background-investigation workflows, and the card management system issues the credential. That makes it a candidate source for proofing and credential status; its authoritative fields and population coverage require confirmation.
 What's usually missing is any link from these to Entra ID or Active Directory: contractor accounts come from tickets.
 Core HCM's Contingent Worker type is a possible fourth source later, if the agency chooses to configure it. It won't exist before the agency's Core HCM onboarding wave.
 Sources: FIPS 201-3 and OMB M-19-17 (PIV for employees and contractors); NIST SP 800-53 Rev. 5, PS-7 (external personnel security).</a:t>
@@ -684,10 +684,10 @@
               <a:t>I propose this working position; it is not yet a decision. It's the same discipline as the employee design: a named authority for every fact.
 I propose the contractor suitability register as the candidate authority for existence, the contract link and suitability, subject to the questions on the next slide. If it also records the end of the engagement, it becomes the contractor's leaver signal, the equivalent of a separation action. That's the first thing to confirm.
 PIV enrollment is the authority for proofing and credential status. Identity reads it and cross-checks it. A badge with no contractor record, or a contractor record with no badge, is a finding.
-The accountable party is a federal employee sponsor, normally the COR, mastered in HR. The contractor's organization placement is derived from the sponsor, so it follows accountability and changes when the sponsor moves.
+The accountable party is a federal employee sponsor, normally the COR, mastered in HR. The contractor's organization placement is an explicit authoritative assignment; the sponsor's organization is a default only where policy confirms that relationship.
 I propose the enterprise person key, the same as for employees, proposed for confirmation. Many agencies already issue it to contractors along with their PIV card, for example as a Mainframe PIN. Where they do, a contractor is keyed exactly like an employee, and keeps the same key on a new contract; in the proposed canonical model, conversion to federal employment creates a new affiliation for the same person.
 On the right: access ends at the earliest of five events. The last two close the gap the Digital Worker playbook leaves open: what happens when the sponsor leaves. The sponsor is a live reference into HR, not a name on a form.
-Design reference: the sponsored identity record pattern. The suitability register fills its engagement and vetting facts. The PIV cross-check follows FIPS 201-3; separation follows NIST SP 800-53 PS-4 and PS-7.</a:t>
+Design reference: the proposed sponsored-identity pattern, with an accountable sponsor, a governed engagement record, identity linkage, recertification and explicit end conditions. The PIV cross-check follows FIPS 201-3; separation follows NIST SP 800-53 PS-4 and PS-7.</a:t>
             </a:r>
           </a:p>
         </p:txBody>
@@ -779,7 +779,7 @@
 Content: if the register records only the suitability decision and its date, it's a vetting source, not a lifecycle source. Then the end date has to come from the contract record or from the sponsor.
 Freshness: if the register is keyed by hand from COR spreadsheets, it inherits their lag, and every separation delay carries over to contractors.
 Privacy: which SORN covers the register, and does a routine use cover disclosure to identity systems? It's the same question the main deck asks for HR data.
-Join on the key: if contractors already get the enterprise key with their PIV card, the key exists. The question is whether the register records it. If it does, the register, PIV enrollment and the directories join on one key. If not, the first job is a crosswalk from the register to the key.
+Join on the key: if contractors may already get the enterprise key with their PIV card, confirm coverage and timing. The question is also whether the register records it. If it does, the register, PIV enrollment and the directories join on one key. If not, the first job is a crosswalk from the register to the key.
 Coverage: who works without a PIV card and isn't in the register? Those people still need a sponsor-only path.
 Source: the register's owner, and the agency's SORN and PIA catalog.</a:t>
             </a:r>
@@ -869,7 +869,7 @@
             <a:r>
               <a:rPr lang="en-US" dirty="0"/>
               <a:t>Start with what already exists, and start read-only.
-Now: reconcile the register and PIV enrollment against the contractor accounts in AD and Entra ID. The output is a list of orphans, meaning accounts with no contractor record, and accounts whose engagement has ended. Nothing is written to any directory. That measures the problem before anyone is asked to change a process.
+Now: reconcile the register and PIV enrollment against the contractor accounts in AD and Entra ID. The output is unmatched accounts, unmatched contractor records, credential mismatches, and any records the available source shows as expired or inactive. Nothing is written to any directory. That measures the problem before anyone is asked to change a process.
 Before Core HCM: I propose that the register plus sponsor attestation become the contractor source, once the contractor authority decision is made. Ship the leaver trigger first, because that's where the risk is, then the joiner. Mismatches between badges and records become findings.
 At Core HCM go-live: decide whether to configure the Contingent Worker type. If the agency adopts it, it holds the person and the assignment, and the register stays the authority for the contract and suitability. Either way, the identity pipeline doesn't change. It reads one canonical record whatever the source.
 The ask is small: make the contractor authority decision, evaluating the suitability register, sponsorship, and contingent-worker records; name its owner; validate the planning assumptions with the data owners; and give read access to the register for a shadow reconciliation.</a:t>
@@ -1690,7 +1690,7 @@
                   <a:srgbClr val="334155"/>
                 </a:solidFill>
               </a:rPr>
-              <a:t>HRIT will carry federal employees only. Most agencies already hold three contractor records. Compose them under an accountable federal sponsor instead of waiting for one feed.</a:t>
+              <a:t>Published Federal HR 2.0 scope centers on federal employees. Most agencies hold several partial contractor records: evaluate them as candidate authorities for a governed sponsored-identity model.</a:t>
             </a:r>
             <a:endParaRPr lang="en-US" sz="1600" dirty="0"/>
           </a:p>
@@ -1752,7 +1752,7 @@
             <a:hlinkClick r:id="" action="ppaction://media"/>
             <a:extLst>
               <a:ext uri="{FF2B5EF4-FFF2-40B4-BE49-F238E27FC236}">
-                <a16:creationId xmlns:a16="http://schemas.microsoft.com/office/drawing/2014/main" id="{8E3D6221-D46A-A29D-4307-E1DB18AD578C}"/>
+                <a16:creationId xmlns:a16="http://schemas.microsoft.com/office/drawing/2014/main" id="{3F94C2F6-D654-B6AD-7E78-CD965EF4266B}"/>
               </a:ext>
             </a:extLst>
           </p:cNvPr>
@@ -1791,10 +1791,10 @@
   </p:clrMapOvr>
   <mc:AlternateContent xmlns:mc="http://schemas.openxmlformats.org/markup-compatibility/2006">
     <mc:Choice xmlns:p14="http://schemas.microsoft.com/office/powerpoint/2010/main" Requires="p14">
-      <p:transition spd="slow" p14:dur="2000" advTm="39930"/>
+      <p:transition spd="slow" p14:dur="2000" advTm="45860"/>
     </mc:Choice>
     <mc:Fallback>
-      <p:transition spd="slow" advTm="39930"/>
+      <p:transition spd="slow" advTm="45860"/>
     </mc:Fallback>
   </mc:AlternateContent>
   <p:timing>
@@ -1828,7 +1828,7 @@
                                   <p:childTnLst>
                                     <p:cmd type="call" cmd="playFrom(0.0)">
                                       <p:cBhvr>
-                                        <p:cTn id="6" dur="38928" fill="hold"/>
+                                        <p:cTn id="6" dur="44856" fill="hold"/>
                                         <p:tgtEl>
                                           <p:spTgt spid="6"/>
                                         </p:tgtEl>
@@ -1922,7 +1922,7 @@
                 <a:ea typeface="Cambria" pitchFamily="34" charset="-122"/>
                 <a:cs typeface="Cambria" pitchFamily="34" charset="-120"/>
               </a:rPr>
-              <a:t>HRIT carries employees; contractors need their own authority</a:t>
+              <a:t>Contractors need an equivalent personnel authority</a:t>
             </a:r>
             <a:endParaRPr lang="en-US" sz="3000" dirty="0"/>
           </a:p>
@@ -2120,7 +2120,7 @@
                   <a:schemeClr val="tx2"/>
                 </a:solidFill>
               </a:rPr>
-              <a:t>Neither document mentions contractors</a:t>
+              <a:t>Contractor treatment not established in the sources reviewed</a:t>
             </a:r>
             <a:endParaRPr lang="en-US" sz="1600" dirty="0"/>
           </a:p>
@@ -2480,7 +2480,7 @@
                   <a:schemeClr val="tx2"/>
                 </a:solidFill>
               </a:rPr>
-              <a:t>GSA ILM Playbook: HR is the sole driver of identity</a:t>
+              <a:t>Federal lifecycle guidance: an authoritative personnel source for identity creation and termination</a:t>
             </a:r>
             <a:endParaRPr lang="en-US" sz="1600" dirty="0"/>
           </a:p>
@@ -2516,7 +2516,7 @@
                   <a:schemeClr val="tx2"/>
                 </a:solidFill>
               </a:rPr>
-              <a:t>The HR system will not carry them</a:t>
+              <a:t>Employee HR may not carry them</a:t>
             </a:r>
             <a:endParaRPr lang="en-US" sz="1600" dirty="0"/>
           </a:p>
@@ -2651,7 +2651,7 @@
             <a:hlinkClick r:id="" action="ppaction://media"/>
             <a:extLst>
               <a:ext uri="{FF2B5EF4-FFF2-40B4-BE49-F238E27FC236}">
-                <a16:creationId xmlns:a16="http://schemas.microsoft.com/office/drawing/2014/main" id="{C46C0B6D-A35A-64E3-27F9-7B752453D855}"/>
+                <a16:creationId xmlns:a16="http://schemas.microsoft.com/office/drawing/2014/main" id="{60576C90-3D9F-53B3-ED0B-F3D1C8FDE44D}"/>
               </a:ext>
             </a:extLst>
           </p:cNvPr>
@@ -2690,10 +2690,10 @@
   </p:clrMapOvr>
   <mc:AlternateContent xmlns:mc="http://schemas.openxmlformats.org/markup-compatibility/2006">
     <mc:Choice xmlns:p14="http://schemas.microsoft.com/office/powerpoint/2010/main" Requires="p14">
-      <p:transition spd="slow" p14:dur="2000" advTm="64720"/>
+      <p:transition spd="slow" p14:dur="2000" advTm="72740"/>
     </mc:Choice>
     <mc:Fallback>
-      <p:transition spd="slow" advTm="64720"/>
+      <p:transition spd="slow" advTm="72740"/>
     </mc:Fallback>
   </mc:AlternateContent>
   <p:timing>
@@ -2727,7 +2727,7 @@
                                   <p:childTnLst>
                                     <p:cmd type="call" cmd="playFrom(0.0)">
                                       <p:cBhvr>
-                                        <p:cTn id="6" dur="63720" fill="hold"/>
+                                        <p:cTn id="6" dur="71736" fill="hold"/>
                                         <p:tgtEl>
                                           <p:spTgt spid="20"/>
                                         </p:tgtEl>
@@ -2821,7 +2821,7 @@
                 <a:ea typeface="Cambria" pitchFamily="34" charset="-122"/>
                 <a:cs typeface="Cambria" pitchFamily="34" charset="-120"/>
               </a:rPr>
-              <a:t>Three contractor records already exist; no feed to identity yet</a:t>
+              <a:t>Three operational contexts hold contractor information</a:t>
             </a:r>
             <a:endParaRPr lang="en-US" sz="3000" dirty="0"/>
           </a:p>
@@ -3160,7 +3160,7 @@
                   <a:schemeClr val="tx2"/>
                 </a:solidFill>
               </a:rPr>
-              <a:t>Each contractor on an agency contract, with the suitability determination and its date.</a:t>
+              <a:t>Per public metadata: contractors on agency contracts, with suitability determination and date. Coverage to validate.</a:t>
             </a:r>
             <a:endParaRPr lang="en-US" sz="1400" dirty="0"/>
           </a:p>
@@ -3341,7 +3341,7 @@
                   <a:schemeClr val="tx2"/>
                 </a:solidFill>
               </a:rPr>
-              <a:t>Enrolls employees and contractors: identity proofing, background investigation, credential lifecycle.</a:t>
+              <a:t>Candidate source for proofing and credential status; authoritative fields and coverage to confirm.</a:t>
             </a:r>
             <a:endParaRPr lang="en-US" sz="1400" dirty="0"/>
           </a:p>
@@ -3739,7 +3739,7 @@
             <a:hlinkClick r:id="" action="ppaction://media"/>
             <a:extLst>
               <a:ext uri="{FF2B5EF4-FFF2-40B4-BE49-F238E27FC236}">
-                <a16:creationId xmlns:a16="http://schemas.microsoft.com/office/drawing/2014/main" id="{58DD3962-871F-F048-3BC1-7F86A613F47D}"/>
+                <a16:creationId xmlns:a16="http://schemas.microsoft.com/office/drawing/2014/main" id="{08C34F98-C849-3EF6-3787-D19EB5B0C476}"/>
               </a:ext>
             </a:extLst>
           </p:cNvPr>
@@ -3778,10 +3778,10 @@
   </p:clrMapOvr>
   <mc:AlternateContent xmlns:mc="http://schemas.openxmlformats.org/markup-compatibility/2006">
     <mc:Choice xmlns:p14="http://schemas.microsoft.com/office/powerpoint/2010/main" Requires="p14">
-      <p:transition spd="slow" p14:dur="2000" advTm="66280"/>
+      <p:transition spd="slow" p14:dur="2000" advTm="78880"/>
     </mc:Choice>
     <mc:Fallback>
-      <p:transition spd="slow" advTm="66280"/>
+      <p:transition spd="slow" advTm="78880"/>
     </mc:Fallback>
   </mc:AlternateContent>
   <p:timing>
@@ -3815,7 +3815,7 @@
                                   <p:childTnLst>
                                     <p:cmd type="call" cmd="playFrom(0.0)">
                                       <p:cBhvr>
-                                        <p:cTn id="6" dur="65280" fill="hold"/>
+                                        <p:cTn id="6" dur="77880" fill="hold"/>
                                         <p:tgtEl>
                                           <p:spTgt spid="32"/>
                                         </p:tgtEl>
@@ -5380,7 +5380,7 @@
                           <a:ea typeface="Calibri" pitchFamily="34" charset="-122"/>
                           <a:cs typeface="Calibri" pitchFamily="34" charset="-120"/>
                         </a:rPr>
-                        <a:t>Contractors on agency contracts</a:t>
+                        <a:t>Contractors on agency contracts (coverage to validate)</a:t>
                       </a:r>
                       <a:endParaRPr lang="en-US" sz="1400" dirty="0">
                         <a:latin typeface="Calibri" charset="0"/>
@@ -5448,7 +5448,7 @@
                           <a:ea typeface="Calibri" pitchFamily="34" charset="-122"/>
                           <a:cs typeface="Calibri" pitchFamily="34" charset="-120"/>
                         </a:rPr>
-                        <a:t>Contract linkage</a:t>
+                        <a:t>Contract linkage, per metadata</a:t>
                       </a:r>
                       <a:endParaRPr lang="en-US" sz="1400" dirty="0">
                         <a:latin typeface="Calibri" charset="0"/>
@@ -6132,7 +6132,7 @@
                   <a:schemeClr val="tx2"/>
                 </a:solidFill>
               </a:rPr>
-              <a:t>Only a suitability register, where one exists, ties a person to an agency contract.</a:t>
+              <a:t>Only a suitability register, where one exists, ties a person to an agency contract; validate it first.</a:t>
             </a:r>
             <a:endParaRPr lang="en-US" sz="1600" dirty="0"/>
           </a:p>
@@ -6189,7 +6189,7 @@
             <a:hlinkClick r:id="" action="ppaction://media"/>
             <a:extLst>
               <a:ext uri="{FF2B5EF4-FFF2-40B4-BE49-F238E27FC236}">
-                <a16:creationId xmlns:a16="http://schemas.microsoft.com/office/drawing/2014/main" id="{07966250-E488-A0E1-15C3-990CA3BD585F}"/>
+                <a16:creationId xmlns:a16="http://schemas.microsoft.com/office/drawing/2014/main" id="{7872FAAC-D346-18D8-BEA6-E7C588026988}"/>
               </a:ext>
             </a:extLst>
           </p:cNvPr>
@@ -7347,7 +7347,7 @@
                           <a:ea typeface="Calibri" pitchFamily="34" charset="-122"/>
                           <a:cs typeface="Calibri" pitchFamily="34" charset="-120"/>
                         </a:rPr>
-                        <a:t>Derived from the sponsor; explicit override if needed</a:t>
+                        <a:t>Explicit authoritative assignment; sponsor’s organization as a default only where policy confirms</a:t>
                       </a:r>
                       <a:endParaRPr lang="en-US" sz="1400" dirty="0">
                         <a:latin typeface="Calibri" charset="0"/>
@@ -7490,7 +7490,7 @@
                           <a:ea typeface="Calibri" pitchFamily="34" charset="-122"/>
                           <a:cs typeface="Calibri" pitchFamily="34" charset="-120"/>
                         </a:rPr>
-                        <a:t>Enterprise person key, proposed for confirmation; often already issued to contractors with their PIV card</a:t>
+                        <a:t>Enterprise person key, proposed for confirmation; often issued to PIV-enabled contractors (confirm)</a:t>
                       </a:r>
                       <a:endParaRPr lang="en-US" sz="1400" dirty="0">
                         <a:latin typeface="Calibri" charset="0"/>
@@ -7761,7 +7761,7 @@
                   <a:schemeClr val="tx2"/>
                 </a:solidFill>
               </a:rPr>
-              <a:t>Sponsor leaves; nobody takes over within 14 days</a:t>
+              <a:t>Sponsor departs without timely reassignment</a:t>
             </a:r>
             <a:endParaRPr lang="en-US" sz="1500" dirty="0"/>
           </a:p>
@@ -7779,7 +7779,7 @@
                   <a:schemeClr val="tx2"/>
                 </a:solidFill>
               </a:rPr>
-              <a:t>Sponsor misses the 180-day recertification</a:t>
+              <a:t>Sponsor recertification overdue under the approved interval</a:t>
             </a:r>
             <a:endParaRPr lang="en-US" sz="1500" dirty="0"/>
           </a:p>
@@ -7815,7 +7815,7 @@
                   <a:srgbClr val="64748B"/>
                 </a:solidFill>
               </a:rPr>
-              <a:t>Proposed pattern: a sponsored identity record, with the suitability register supplying the contract and vetting facts.</a:t>
+              <a:t>Proposed pattern: a sponsored identity record, with the suitability register as the candidate for contract and vetting facts.</a:t>
             </a:r>
             <a:endParaRPr lang="en-US" sz="1200" dirty="0"/>
           </a:p>
@@ -7872,7 +7872,7 @@
             <a:hlinkClick r:id="" action="ppaction://media"/>
             <a:extLst>
               <a:ext uri="{FF2B5EF4-FFF2-40B4-BE49-F238E27FC236}">
-                <a16:creationId xmlns:a16="http://schemas.microsoft.com/office/drawing/2014/main" id="{F5DBD49D-0A84-AC34-78DE-85AB67B3B837}"/>
+                <a16:creationId xmlns:a16="http://schemas.microsoft.com/office/drawing/2014/main" id="{48978FD8-B28F-9498-8412-6082F7A84BF2}"/>
               </a:ext>
             </a:extLst>
           </p:cNvPr>
@@ -7911,10 +7911,10 @@
   </p:clrMapOvr>
   <mc:AlternateContent xmlns:mc="http://schemas.openxmlformats.org/markup-compatibility/2006">
     <mc:Choice xmlns:p14="http://schemas.microsoft.com/office/powerpoint/2010/main" Requires="p14">
-      <p:transition spd="slow" p14:dur="2000" advTm="95130"/>
+      <p:transition spd="slow" p14:dur="2000" advTm="97620"/>
     </mc:Choice>
     <mc:Fallback>
-      <p:transition spd="slow" advTm="95130"/>
+      <p:transition spd="slow" advTm="97620"/>
     </mc:Fallback>
   </mc:AlternateContent>
   <p:timing>
@@ -7948,7 +7948,7 @@
                                   <p:childTnLst>
                                     <p:cmd type="call" cmd="playFrom(0.0)">
                                       <p:cBhvr>
-                                        <p:cTn id="6" dur="94128" fill="hold"/>
+                                        <p:cTn id="6" dur="96624" fill="hold"/>
                                         <p:tgtEl>
                                           <p:spTgt spid="10"/>
                                         </p:tgtEl>
@@ -8832,7 +8832,7 @@
                   <a:schemeClr val="tx2"/>
                 </a:solidFill>
               </a:rPr>
-              <a:t>If contractors already hold the enterprise key, does the register record it?</a:t>
+              <a:t>If contractors may already hold the enterprise key, confirm coverage, and whether the register records it.</a:t>
             </a:r>
             <a:endParaRPr lang="en-US" sz="1450" dirty="0"/>
           </a:p>
@@ -9083,7 +9083,7 @@
             <a:hlinkClick r:id="" action="ppaction://media"/>
             <a:extLst>
               <a:ext uri="{FF2B5EF4-FFF2-40B4-BE49-F238E27FC236}">
-                <a16:creationId xmlns:a16="http://schemas.microsoft.com/office/drawing/2014/main" id="{488AAD83-7B52-34C1-461D-4A1666637B26}"/>
+                <a16:creationId xmlns:a16="http://schemas.microsoft.com/office/drawing/2014/main" id="{FA651C52-D892-F318-B0D3-DA02ACBBDB9E}"/>
               </a:ext>
             </a:extLst>
           </p:cNvPr>
@@ -9122,10 +9122,10 @@
   </p:clrMapOvr>
   <mc:AlternateContent xmlns:mc="http://schemas.openxmlformats.org/markup-compatibility/2006">
     <mc:Choice xmlns:p14="http://schemas.microsoft.com/office/powerpoint/2010/main" Requires="p14">
-      <p:transition spd="slow" p14:dur="2000" advTm="74060"/>
+      <p:transition spd="slow" p14:dur="2000" advTm="74990"/>
     </mc:Choice>
     <mc:Fallback>
-      <p:transition spd="slow" advTm="74060"/>
+      <p:transition spd="slow" advTm="74990"/>
     </mc:Fallback>
   </mc:AlternateContent>
   <p:timing>
@@ -9159,7 +9159,7 @@
                                   <p:childTnLst>
                                     <p:cmd type="call" cmd="playFrom(0.0)">
                                       <p:cBhvr>
-                                        <p:cTn id="6" dur="73056" fill="hold"/>
+                                        <p:cTn id="6" dur="73992" fill="hold"/>
                                         <p:tgtEl>
                                           <p:spTgt spid="35"/>
                                         </p:tgtEl>
@@ -9433,7 +9433,7 @@
                   <a:schemeClr val="tx2"/>
                 </a:solidFill>
               </a:rPr>
-              <a:t>Report orphans and expired engagements</a:t>
+              <a:t>Report unmatched accounts, records and credential mismatches</a:t>
             </a:r>
             <a:endParaRPr lang="en-US" sz="1550" dirty="0"/>
           </a:p>
@@ -10030,7 +10030,7 @@
             <a:hlinkClick r:id="" action="ppaction://media"/>
             <a:extLst>
               <a:ext uri="{FF2B5EF4-FFF2-40B4-BE49-F238E27FC236}">
-                <a16:creationId xmlns:a16="http://schemas.microsoft.com/office/drawing/2014/main" id="{B1E7AB39-4E32-1F32-2F5A-E48689515C64}"/>
+                <a16:creationId xmlns:a16="http://schemas.microsoft.com/office/drawing/2014/main" id="{F4C14DE2-A551-6B6B-56CA-1DF744A7B220}"/>
               </a:ext>
             </a:extLst>
           </p:cNvPr>
@@ -10069,10 +10069,10 @@
   </p:clrMapOvr>
   <mc:AlternateContent xmlns:mc="http://schemas.openxmlformats.org/markup-compatibility/2006">
     <mc:Choice xmlns:p14="http://schemas.microsoft.com/office/powerpoint/2010/main" Requires="p14">
-      <p:transition spd="slow" p14:dur="2000" advTm="79120"/>
+      <p:transition spd="slow" p14:dur="2000" advTm="82120"/>
     </mc:Choice>
     <mc:Fallback>
-      <p:transition spd="slow" advTm="79120"/>
+      <p:transition spd="slow" advTm="82120"/>
     </mc:Fallback>
   </mc:AlternateContent>
   <p:timing>
@@ -10106,7 +10106,7 @@
                                   <p:childTnLst>
                                     <p:cmd type="call" cmd="playFrom(0.0)">
                                       <p:cBhvr>
-                                        <p:cTn id="6" dur="78120" fill="hold"/>
+                                        <p:cTn id="6" dur="81120" fill="hold"/>
                                         <p:tgtEl>
                                           <p:spTgt spid="22"/>
                                         </p:tgtEl>

--- a/presentations/hr-driven-identity-interview/HR_Driven_Identity_Contractor_Source_AnyAgency_Narrated.pptx
+++ b/presentations/hr-driven-identity-interview/HR_Driven_Identity_Contractor_Source_AnyAgency_Narrated.pptx
@@ -1726,7 +1726,7 @@
                   <a:srgbClr val="1F2A44"/>
                 </a:solidFill>
               </a:rPr>
-              <a:t>Mike Stratton</a:t>
+              <a:t>Michael F. Stratton</a:t>
             </a:r>
             <a:endParaRPr lang="en-US" sz="1600" dirty="0"/>
           </a:p>
@@ -1748,7 +1748,7 @@
       </p:sp>
       <p:pic>
         <p:nvPicPr>
-          <p:cNvPr id="6" name="Narration">
+          <p:cNvPr id="6" name="Narration" descr="Narration for this slide; captions available" title="Narration">
             <a:hlinkClick r:id="" action="ppaction://media"/>
             <a:extLst>
               <a:ext uri="{FF2B5EF4-FFF2-40B4-BE49-F238E27FC236}">
@@ -1763,7 +1763,17 @@
             <a:audioFile r:link="rId2"/>
             <p:extLst>
               <p:ext uri="{DAA4B4D4-6D71-4841-9C94-3DE7FCFB9230}">
-                <p14:media xmlns:p14="http://schemas.microsoft.com/office/powerpoint/2010/main" r:embed="rId1"/>
+                <p14:media xmlns:p14="http://schemas.microsoft.com/office/powerpoint/2010/main" r:embed="rId1">
+                  <p14:extLst>
+                    <p:ext uri="{3AFAAA56-56D3-431D-BCD4-E75A35582382}">
+                      <p173:tracksInfo xmlns:p173="http://schemas.microsoft.com/office/powerpoint/2017/3/main" displayLoc="slide">
+                        <p173:trackLst>
+                          <p173:track id="{11BA3BBF-1F2B-4491-BA4F-7E04FB782281}" label="English (captions)" lang="en-US" r:embed="rId6"/>
+                        </p173:trackLst>
+                      </p173:tracksInfo>
+                    </p:ext>
+                  </p14:extLst>
+                </p14:media>
               </p:ext>
             </p:extLst>
           </p:nvPr>
@@ -1930,7 +1940,13 @@
       </p:sp>
       <p:sp>
         <p:nvSpPr>
-          <p:cNvPr id="3" name="Core HCM scope card"/>
+          <p:cNvPr id="3" name="Core HCM scope card" descr="">
+            <a:extLst>
+              <a:ext uri="{C183D7F6-B498-43B3-948B-1728B52AA6E4}">
+                <adec:decorative xmlns:adec="http://schemas.microsoft.com/office/drawing/2017/decorative" val="1"/>
+              </a:ext>
+            </a:extLst>
+          </p:cNvPr>
           <p:cNvSpPr/>
           <p:nvPr/>
         </p:nvSpPr>
@@ -1964,7 +1980,13 @@
       </p:sp>
       <p:sp>
         <p:nvSpPr>
-          <p:cNvPr id="4" name="Icon FaBuildingColumns"/>
+          <p:cNvPr id="4" name="Icon FaBuildingColumns" descr="">
+            <a:extLst>
+              <a:ext uri="{C183D7F6-B498-43B3-948B-1728B52AA6E4}">
+                <adec:decorative xmlns:adec="http://schemas.microsoft.com/office/drawing/2017/decorative" val="1"/>
+              </a:ext>
+            </a:extLst>
+          </p:cNvPr>
           <p:cNvSpPr/>
           <p:nvPr/>
         </p:nvSpPr>
@@ -1989,7 +2011,13 @@
       </p:sp>
       <p:pic>
         <p:nvPicPr>
-          <p:cNvPr id="5" name="Image 0" descr="C:\Users\whale\git\uiao\inbox\SSA-Interview\build\icons\FaBuildingColumns.png"/>
+          <p:cNvPr id="5" name="Image 0" descr="">
+            <a:extLst>
+              <a:ext uri="{C183D7F6-B498-43B3-948B-1728B52AA6E4}">
+                <adec:decorative xmlns:adec="http://schemas.microsoft.com/office/drawing/2017/decorative" val="1"/>
+              </a:ext>
+            </a:extLst>
+          </p:cNvPr>
           <p:cNvPicPr>
             <a:picLocks noChangeAspect="1"/>
           </p:cNvPicPr>
@@ -2128,7 +2156,13 @@
       </p:sp>
       <p:sp>
         <p:nvSpPr>
-          <p:cNvPr id="8" name="Today (observed) card"/>
+          <p:cNvPr id="8" name="Today (observed) card" descr="">
+            <a:extLst>
+              <a:ext uri="{C183D7F6-B498-43B3-948B-1728B52AA6E4}">
+                <adec:decorative xmlns:adec="http://schemas.microsoft.com/office/drawing/2017/decorative" val="1"/>
+              </a:ext>
+            </a:extLst>
+          </p:cNvPr>
           <p:cNvSpPr/>
           <p:nvPr/>
         </p:nvSpPr>
@@ -2162,7 +2196,13 @@
       </p:sp>
       <p:sp>
         <p:nvSpPr>
-          <p:cNvPr id="9" name="Icon FaTableList"/>
+          <p:cNvPr id="9" name="Icon FaTableList" descr="">
+            <a:extLst>
+              <a:ext uri="{C183D7F6-B498-43B3-948B-1728B52AA6E4}">
+                <adec:decorative xmlns:adec="http://schemas.microsoft.com/office/drawing/2017/decorative" val="1"/>
+              </a:ext>
+            </a:extLst>
+          </p:cNvPr>
           <p:cNvSpPr/>
           <p:nvPr/>
         </p:nvSpPr>
@@ -2187,7 +2227,13 @@
       </p:sp>
       <p:pic>
         <p:nvPicPr>
-          <p:cNvPr id="10" name="Image 1" descr="C:\Users\whale\git\uiao\inbox\SSA-Interview\build\icons\FaTableList.png"/>
+          <p:cNvPr id="10" name="Image 1" descr="">
+            <a:extLst>
+              <a:ext uri="{C183D7F6-B498-43B3-948B-1728B52AA6E4}">
+                <adec:decorative xmlns:adec="http://schemas.microsoft.com/office/drawing/2017/decorative" val="1"/>
+              </a:ext>
+            </a:extLst>
+          </p:cNvPr>
           <p:cNvPicPr>
             <a:picLocks noChangeAspect="1"/>
           </p:cNvPicPr>
@@ -2326,7 +2372,13 @@
       </p:sp>
       <p:sp>
         <p:nvSpPr>
-          <p:cNvPr id="13" name="Guidance conflict card"/>
+          <p:cNvPr id="13" name="Guidance conflict card" descr="">
+            <a:extLst>
+              <a:ext uri="{C183D7F6-B498-43B3-948B-1728B52AA6E4}">
+                <adec:decorative xmlns:adec="http://schemas.microsoft.com/office/drawing/2017/decorative" val="1"/>
+              </a:ext>
+            </a:extLst>
+          </p:cNvPr>
           <p:cNvSpPr/>
           <p:nvPr/>
         </p:nvSpPr>
@@ -2360,7 +2412,13 @@
       </p:sp>
       <p:sp>
         <p:nvSpPr>
-          <p:cNvPr id="14" name="Icon FaScaleBalanced"/>
+          <p:cNvPr id="14" name="Icon FaScaleBalanced" descr="">
+            <a:extLst>
+              <a:ext uri="{C183D7F6-B498-43B3-948B-1728B52AA6E4}">
+                <adec:decorative xmlns:adec="http://schemas.microsoft.com/office/drawing/2017/decorative" val="1"/>
+              </a:ext>
+            </a:extLst>
+          </p:cNvPr>
           <p:cNvSpPr/>
           <p:nvPr/>
         </p:nvSpPr>
@@ -2385,7 +2443,13 @@
       </p:sp>
       <p:pic>
         <p:nvPicPr>
-          <p:cNvPr id="15" name="Image 2" descr="C:\Users\whale\git\uiao\inbox\SSA-Interview\build\icons\FaScaleBalanced.png"/>
+          <p:cNvPr id="15" name="Image 2" descr="">
+            <a:extLst>
+              <a:ext uri="{C183D7F6-B498-43B3-948B-1728B52AA6E4}">
+                <adec:decorative xmlns:adec="http://schemas.microsoft.com/office/drawing/2017/decorative" val="1"/>
+              </a:ext>
+            </a:extLst>
+          </p:cNvPr>
           <p:cNvPicPr>
             <a:picLocks noChangeAspect="1"/>
           </p:cNvPicPr>
@@ -2524,7 +2588,13 @@
       </p:sp>
       <p:sp>
         <p:nvSpPr>
-          <p:cNvPr id="18" name="Question band"/>
+          <p:cNvPr id="18" name="Question band" descr="">
+            <a:extLst>
+              <a:ext uri="{C183D7F6-B498-43B3-948B-1728B52AA6E4}">
+                <adec:decorative xmlns:adec="http://schemas.microsoft.com/office/drawing/2017/decorative" val="1"/>
+              </a:ext>
+            </a:extLst>
+          </p:cNvPr>
           <p:cNvSpPr/>
           <p:nvPr/>
         </p:nvSpPr>
@@ -2647,7 +2717,7 @@
       </p:sp>
       <p:pic>
         <p:nvPicPr>
-          <p:cNvPr id="20" name="Narration">
+          <p:cNvPr id="20" name="Narration" descr="Narration for this slide; captions available" title="Narration">
             <a:hlinkClick r:id="" action="ppaction://media"/>
             <a:extLst>
               <a:ext uri="{FF2B5EF4-FFF2-40B4-BE49-F238E27FC236}">
@@ -2662,7 +2732,17 @@
             <a:audioFile r:link="rId2"/>
             <p:extLst>
               <p:ext uri="{DAA4B4D4-6D71-4841-9C94-3DE7FCFB9230}">
-                <p14:media xmlns:p14="http://schemas.microsoft.com/office/powerpoint/2010/main" r:embed="rId1"/>
+                <p14:media xmlns:p14="http://schemas.microsoft.com/office/powerpoint/2010/main" r:embed="rId1">
+                  <p14:extLst>
+                    <p:ext uri="{3AFAAA56-56D3-431D-BCD4-E75A35582382}">
+                      <p173:tracksInfo xmlns:p173="http://schemas.microsoft.com/office/powerpoint/2017/3/main" displayLoc="slide">
+                        <p173:trackLst>
+                          <p173:track id="{3F6CCFA3-8299-4786-A7AC-600085D2AEA1}" label="English (captions)" lang="en-US" r:embed="rId9"/>
+                        </p173:trackLst>
+                      </p173:tracksInfo>
+                    </p:ext>
+                  </p14:extLst>
+                </p14:media>
               </p:ext>
             </p:extLst>
           </p:nvPr>
@@ -2829,7 +2909,13 @@
       </p:sp>
       <p:sp>
         <p:nvSpPr>
-          <p:cNvPr id="3" name="COR spreadsheets box"/>
+          <p:cNvPr id="3" name="COR spreadsheets box" descr="">
+            <a:extLst>
+              <a:ext uri="{C183D7F6-B498-43B3-948B-1728B52AA6E4}">
+                <adec:decorative xmlns:adec="http://schemas.microsoft.com/office/drawing/2017/decorative" val="1"/>
+              </a:ext>
+            </a:extLst>
+          </p:cNvPr>
           <p:cNvSpPr/>
           <p:nvPr/>
         </p:nvSpPr>
@@ -2863,7 +2949,13 @@
       </p:sp>
       <p:sp>
         <p:nvSpPr>
-          <p:cNvPr id="4" name="Icon FaTableList"/>
+          <p:cNvPr id="4" name="Icon FaTableList" descr="">
+            <a:extLst>
+              <a:ext uri="{C183D7F6-B498-43B3-948B-1728B52AA6E4}">
+                <adec:decorative xmlns:adec="http://schemas.microsoft.com/office/drawing/2017/decorative" val="1"/>
+              </a:ext>
+            </a:extLst>
+          </p:cNvPr>
           <p:cNvSpPr/>
           <p:nvPr/>
         </p:nvSpPr>
@@ -2888,7 +2980,13 @@
       </p:sp>
       <p:pic>
         <p:nvPicPr>
-          <p:cNvPr id="5" name="Image 0" descr="C:\Users\whale\git\uiao\inbox\SSA-Interview\build\icons\FaTableList.png"/>
+          <p:cNvPr id="5" name="Image 0" descr="">
+            <a:extLst>
+              <a:ext uri="{C183D7F6-B498-43B3-948B-1728B52AA6E4}">
+                <adec:decorative xmlns:adec="http://schemas.microsoft.com/office/drawing/2017/decorative" val="1"/>
+              </a:ext>
+            </a:extLst>
+          </p:cNvPr>
           <p:cNvPicPr>
             <a:picLocks noChangeAspect="1"/>
           </p:cNvPicPr>
@@ -2987,7 +3085,13 @@
       </p:sp>
       <p:sp>
         <p:nvSpPr>
-          <p:cNvPr id="8" name="Shape 5"/>
+          <p:cNvPr id="8" name="Shape 5" descr="">
+            <a:extLst>
+              <a:ext uri="{C183D7F6-B498-43B3-948B-1728B52AA6E4}">
+                <adec:decorative xmlns:adec="http://schemas.microsoft.com/office/drawing/2017/decorative" val="1"/>
+              </a:ext>
+            </a:extLst>
+          </p:cNvPr>
           <p:cNvSpPr/>
           <p:nvPr/>
         </p:nvSpPr>
@@ -3010,7 +3114,13 @@
       </p:sp>
       <p:sp>
         <p:nvSpPr>
-          <p:cNvPr id="9" name="Contractor suitability register box"/>
+          <p:cNvPr id="9" name="Contractor suitability register box" descr="">
+            <a:extLst>
+              <a:ext uri="{C183D7F6-B498-43B3-948B-1728B52AA6E4}">
+                <adec:decorative xmlns:adec="http://schemas.microsoft.com/office/drawing/2017/decorative" val="1"/>
+              </a:ext>
+            </a:extLst>
+          </p:cNvPr>
           <p:cNvSpPr/>
           <p:nvPr/>
         </p:nvSpPr>
@@ -3044,7 +3154,13 @@
       </p:sp>
       <p:sp>
         <p:nvSpPr>
-          <p:cNvPr id="10" name="Icon FaFileContract"/>
+          <p:cNvPr id="10" name="Icon FaFileContract" descr="">
+            <a:extLst>
+              <a:ext uri="{C183D7F6-B498-43B3-948B-1728B52AA6E4}">
+                <adec:decorative xmlns:adec="http://schemas.microsoft.com/office/drawing/2017/decorative" val="1"/>
+              </a:ext>
+            </a:extLst>
+          </p:cNvPr>
           <p:cNvSpPr/>
           <p:nvPr/>
         </p:nvSpPr>
@@ -3069,7 +3185,13 @@
       </p:sp>
       <p:pic>
         <p:nvPicPr>
-          <p:cNvPr id="11" name="Image 1" descr="C:\Users\whale\git\uiao\inbox\SSA-Interview\build\icons\FaFileContract.png"/>
+          <p:cNvPr id="11" name="Image 1" descr="">
+            <a:extLst>
+              <a:ext uri="{C183D7F6-B498-43B3-948B-1728B52AA6E4}">
+                <adec:decorative xmlns:adec="http://schemas.microsoft.com/office/drawing/2017/decorative" val="1"/>
+              </a:ext>
+            </a:extLst>
+          </p:cNvPr>
           <p:cNvPicPr>
             <a:picLocks noChangeAspect="1"/>
           </p:cNvPicPr>
@@ -3168,7 +3290,13 @@
       </p:sp>
       <p:sp>
         <p:nvSpPr>
-          <p:cNvPr id="14" name="Shape 10"/>
+          <p:cNvPr id="14" name="Shape 10" descr="">
+            <a:extLst>
+              <a:ext uri="{C183D7F6-B498-43B3-948B-1728B52AA6E4}">
+                <adec:decorative xmlns:adec="http://schemas.microsoft.com/office/drawing/2017/decorative" val="1"/>
+              </a:ext>
+            </a:extLst>
+          </p:cNvPr>
           <p:cNvSpPr/>
           <p:nvPr/>
         </p:nvSpPr>
@@ -3191,7 +3319,13 @@
       </p:sp>
       <p:sp>
         <p:nvSpPr>
-          <p:cNvPr id="15" name="PIV enrollment box"/>
+          <p:cNvPr id="15" name="PIV enrollment box" descr="">
+            <a:extLst>
+              <a:ext uri="{C183D7F6-B498-43B3-948B-1728B52AA6E4}">
+                <adec:decorative xmlns:adec="http://schemas.microsoft.com/office/drawing/2017/decorative" val="1"/>
+              </a:ext>
+            </a:extLst>
+          </p:cNvPr>
           <p:cNvSpPr/>
           <p:nvPr/>
         </p:nvSpPr>
@@ -3225,7 +3359,13 @@
       </p:sp>
       <p:sp>
         <p:nvSpPr>
-          <p:cNvPr id="16" name="Icon FaIdCard"/>
+          <p:cNvPr id="16" name="Icon FaIdCard" descr="">
+            <a:extLst>
+              <a:ext uri="{C183D7F6-B498-43B3-948B-1728B52AA6E4}">
+                <adec:decorative xmlns:adec="http://schemas.microsoft.com/office/drawing/2017/decorative" val="1"/>
+              </a:ext>
+            </a:extLst>
+          </p:cNvPr>
           <p:cNvSpPr/>
           <p:nvPr/>
         </p:nvSpPr>
@@ -3250,7 +3390,13 @@
       </p:sp>
       <p:pic>
         <p:nvPicPr>
-          <p:cNvPr id="17" name="Image 2" descr="C:\Users\whale\git\uiao\inbox\SSA-Interview\build\icons\FaIdCard.png"/>
+          <p:cNvPr id="17" name="Image 2" descr="">
+            <a:extLst>
+              <a:ext uri="{C183D7F6-B498-43B3-948B-1728B52AA6E4}">
+                <adec:decorative xmlns:adec="http://schemas.microsoft.com/office/drawing/2017/decorative" val="1"/>
+              </a:ext>
+            </a:extLst>
+          </p:cNvPr>
           <p:cNvPicPr>
             <a:picLocks noChangeAspect="1"/>
           </p:cNvPicPr>
@@ -3349,7 +3495,13 @@
       </p:sp>
       <p:sp>
         <p:nvSpPr>
-          <p:cNvPr id="20" name="Shape 15"/>
+          <p:cNvPr id="20" name="Shape 15" descr="">
+            <a:extLst>
+              <a:ext uri="{C183D7F6-B498-43B3-948B-1728B52AA6E4}">
+                <adec:decorative xmlns:adec="http://schemas.microsoft.com/office/drawing/2017/decorative" val="1"/>
+              </a:ext>
+            </a:extLst>
+          </p:cNvPr>
           <p:cNvSpPr/>
           <p:nvPr/>
         </p:nvSpPr>
@@ -3372,7 +3524,13 @@
       </p:sp>
       <p:sp>
         <p:nvSpPr>
-          <p:cNvPr id="21" name="Shape 16"/>
+          <p:cNvPr id="21" name="Shape 16" descr="">
+            <a:extLst>
+              <a:ext uri="{C183D7F6-B498-43B3-948B-1728B52AA6E4}">
+                <adec:decorative xmlns:adec="http://schemas.microsoft.com/office/drawing/2017/decorative" val="1"/>
+              </a:ext>
+            </a:extLst>
+          </p:cNvPr>
           <p:cNvSpPr/>
           <p:nvPr/>
         </p:nvSpPr>
@@ -3395,7 +3553,13 @@
       </p:sp>
       <p:sp>
         <p:nvSpPr>
-          <p:cNvPr id="22" name="Shape 17"/>
+          <p:cNvPr id="22" name="Shape 17" descr="">
+            <a:extLst>
+              <a:ext uri="{C183D7F6-B498-43B3-948B-1728B52AA6E4}">
+                <adec:decorative xmlns:adec="http://schemas.microsoft.com/office/drawing/2017/decorative" val="1"/>
+              </a:ext>
+            </a:extLst>
+          </p:cNvPr>
           <p:cNvSpPr/>
           <p:nvPr/>
         </p:nvSpPr>
@@ -3454,7 +3618,13 @@
       </p:sp>
       <p:sp>
         <p:nvSpPr>
-          <p:cNvPr id="24" name="Directory box"/>
+          <p:cNvPr id="24" name="Directory box" descr="">
+            <a:extLst>
+              <a:ext uri="{C183D7F6-B498-43B3-948B-1728B52AA6E4}">
+                <adec:decorative xmlns:adec="http://schemas.microsoft.com/office/drawing/2017/decorative" val="1"/>
+              </a:ext>
+            </a:extLst>
+          </p:cNvPr>
           <p:cNvSpPr/>
           <p:nvPr/>
         </p:nvSpPr>
@@ -3488,7 +3658,13 @@
       </p:sp>
       <p:sp>
         <p:nvSpPr>
-          <p:cNvPr id="25" name="Icon FaCloud"/>
+          <p:cNvPr id="25" name="Icon FaCloud" descr="">
+            <a:extLst>
+              <a:ext uri="{C183D7F6-B498-43B3-948B-1728B52AA6E4}">
+                <adec:decorative xmlns:adec="http://schemas.microsoft.com/office/drawing/2017/decorative" val="1"/>
+              </a:ext>
+            </a:extLst>
+          </p:cNvPr>
           <p:cNvSpPr/>
           <p:nvPr/>
         </p:nvSpPr>
@@ -3513,7 +3689,13 @@
       </p:sp>
       <p:pic>
         <p:nvPicPr>
-          <p:cNvPr id="26" name="Image 3" descr="C:\Users\whale\git\uiao\inbox\SSA-Interview\build\icons\FaCloud.png"/>
+          <p:cNvPr id="26" name="Image 3" descr="">
+            <a:extLst>
+              <a:ext uri="{C183D7F6-B498-43B3-948B-1728B52AA6E4}">
+                <adec:decorative xmlns:adec="http://schemas.microsoft.com/office/drawing/2017/decorative" val="1"/>
+              </a:ext>
+            </a:extLst>
+          </p:cNvPr>
           <p:cNvPicPr>
             <a:picLocks noChangeAspect="1"/>
           </p:cNvPicPr>
@@ -3612,7 +3794,13 @@
       </p:sp>
       <p:sp>
         <p:nvSpPr>
-          <p:cNvPr id="29" name="Later band"/>
+          <p:cNvPr id="29" name="Later band" descr="">
+            <a:extLst>
+              <a:ext uri="{C183D7F6-B498-43B3-948B-1728B52AA6E4}">
+                <adec:decorative xmlns:adec="http://schemas.microsoft.com/office/drawing/2017/decorative" val="1"/>
+              </a:ext>
+            </a:extLst>
+          </p:cNvPr>
           <p:cNvSpPr/>
           <p:nvPr/>
         </p:nvSpPr>
@@ -3735,7 +3923,7 @@
       </p:sp>
       <p:pic>
         <p:nvPicPr>
-          <p:cNvPr id="32" name="Narration">
+          <p:cNvPr id="32" name="Narration" descr="Narration for this slide; captions available" title="Narration">
             <a:hlinkClick r:id="" action="ppaction://media"/>
             <a:extLst>
               <a:ext uri="{FF2B5EF4-FFF2-40B4-BE49-F238E27FC236}">
@@ -3750,7 +3938,17 @@
             <a:audioFile r:link="rId2"/>
             <p:extLst>
               <p:ext uri="{DAA4B4D4-6D71-4841-9C94-3DE7FCFB9230}">
-                <p14:media xmlns:p14="http://schemas.microsoft.com/office/powerpoint/2010/main" r:embed="rId1"/>
+                <p14:media xmlns:p14="http://schemas.microsoft.com/office/powerpoint/2010/main" r:embed="rId1">
+                  <p14:extLst>
+                    <p:ext uri="{3AFAAA56-56D3-431D-BCD4-E75A35582382}">
+                      <p173:tracksInfo xmlns:p173="http://schemas.microsoft.com/office/powerpoint/2017/3/main" displayLoc="slide">
+                        <p173:trackLst>
+                          <p173:track id="{ED7CAB98-E2E2-4E96-99D6-046E8153EA94}" label="English (captions)" lang="en-US" r:embed="rId10"/>
+                        </p173:trackLst>
+                      </p173:tracksInfo>
+                    </p:ext>
+                  </p14:extLst>
+                </p14:media>
               </p:ext>
             </p:extLst>
           </p:nvPr>
@@ -3936,7 +4134,7 @@
         <a:graphic>
           <a:graphicData uri="http://schemas.openxmlformats.org/drawingml/2006/table">
             <a:tbl>
-              <a:tblPr/>
+              <a:tblPr firstRow="1" bandRow="1"/>
               <a:tblGrid>
                 <a:gridCol w="2240280">
                   <a:extLst>
@@ -6062,7 +6260,13 @@
       </p:graphicFrame>
       <p:sp>
         <p:nvSpPr>
-          <p:cNvPr id="4" name="Takeaway band"/>
+          <p:cNvPr id="4" name="Takeaway band" descr="">
+            <a:extLst>
+              <a:ext uri="{C183D7F6-B498-43B3-948B-1728B52AA6E4}">
+                <adec:decorative xmlns:adec="http://schemas.microsoft.com/office/drawing/2017/decorative" val="1"/>
+              </a:ext>
+            </a:extLst>
+          </p:cNvPr>
           <p:cNvSpPr/>
           <p:nvPr/>
         </p:nvSpPr>
@@ -6185,7 +6389,7 @@
       </p:sp>
       <p:pic>
         <p:nvPicPr>
-          <p:cNvPr id="6" name="Narration">
+          <p:cNvPr id="6" name="Narration" descr="Narration for this slide; captions available" title="Narration">
             <a:hlinkClick r:id="" action="ppaction://media"/>
             <a:extLst>
               <a:ext uri="{FF2B5EF4-FFF2-40B4-BE49-F238E27FC236}">
@@ -6200,7 +6404,17 @@
             <a:audioFile r:link="rId2"/>
             <p:extLst>
               <p:ext uri="{DAA4B4D4-6D71-4841-9C94-3DE7FCFB9230}">
-                <p14:media xmlns:p14="http://schemas.microsoft.com/office/powerpoint/2010/main" r:embed="rId1"/>
+                <p14:media xmlns:p14="http://schemas.microsoft.com/office/powerpoint/2010/main" r:embed="rId1">
+                  <p14:extLst>
+                    <p:ext uri="{3AFAAA56-56D3-431D-BCD4-E75A35582382}">
+                      <p173:tracksInfo xmlns:p173="http://schemas.microsoft.com/office/powerpoint/2017/3/main" displayLoc="slide">
+                        <p173:trackLst>
+                          <p173:track id="{8E6BAB3A-E5F0-4BC6-A7E9-575D84550ED6}" label="English (captions)" lang="en-US" r:embed="rId6"/>
+                        </p173:trackLst>
+                      </p173:tracksInfo>
+                    </p:ext>
+                  </p14:extLst>
+                </p14:media>
               </p:ext>
             </p:extLst>
           </p:nvPr>
@@ -6386,7 +6600,7 @@
         <a:graphic>
           <a:graphicData uri="http://schemas.openxmlformats.org/drawingml/2006/table">
             <a:tbl>
-              <a:tblPr/>
+              <a:tblPr firstRow="1" bandRow="1"/>
               <a:tblGrid>
                 <a:gridCol w="3017520">
                   <a:extLst>
@@ -7553,7 +7767,13 @@
       </p:graphicFrame>
       <p:sp>
         <p:nvSpPr>
-          <p:cNvPr id="4" name="Leaver card"/>
+          <p:cNvPr id="4" name="Leaver card" descr="">
+            <a:extLst>
+              <a:ext uri="{C183D7F6-B498-43B3-948B-1728B52AA6E4}">
+                <adec:decorative xmlns:adec="http://schemas.microsoft.com/office/drawing/2017/decorative" val="1"/>
+              </a:ext>
+            </a:extLst>
+          </p:cNvPr>
           <p:cNvSpPr/>
           <p:nvPr/>
         </p:nvSpPr>
@@ -7587,7 +7807,13 @@
       </p:sp>
       <p:sp>
         <p:nvSpPr>
-          <p:cNvPr id="5" name="Icon FaUserXmark"/>
+          <p:cNvPr id="5" name="Icon FaUserXmark" descr="">
+            <a:extLst>
+              <a:ext uri="{C183D7F6-B498-43B3-948B-1728B52AA6E4}">
+                <adec:decorative xmlns:adec="http://schemas.microsoft.com/office/drawing/2017/decorative" val="1"/>
+              </a:ext>
+            </a:extLst>
+          </p:cNvPr>
           <p:cNvSpPr/>
           <p:nvPr/>
         </p:nvSpPr>
@@ -7612,7 +7838,13 @@
       </p:sp>
       <p:pic>
         <p:nvPicPr>
-          <p:cNvPr id="3" name="Image 0" descr="C:\Users\whale\git\uiao\inbox\SSA-Interview\build\icons\FaUserXmark.png"/>
+          <p:cNvPr id="3" name="Image 0" descr="">
+            <a:extLst>
+              <a:ext uri="{C183D7F6-B498-43B3-948B-1728B52AA6E4}">
+                <adec:decorative xmlns:adec="http://schemas.microsoft.com/office/drawing/2017/decorative" val="1"/>
+              </a:ext>
+            </a:extLst>
+          </p:cNvPr>
           <p:cNvPicPr>
             <a:picLocks noChangeAspect="1"/>
           </p:cNvPicPr>
@@ -7868,7 +8100,7 @@
       </p:sp>
       <p:pic>
         <p:nvPicPr>
-          <p:cNvPr id="10" name="Narration">
+          <p:cNvPr id="10" name="Narration" descr="Narration for this slide; captions available" title="Narration">
             <a:hlinkClick r:id="" action="ppaction://media"/>
             <a:extLst>
               <a:ext uri="{FF2B5EF4-FFF2-40B4-BE49-F238E27FC236}">
@@ -7883,7 +8115,17 @@
             <a:audioFile r:link="rId2"/>
             <p:extLst>
               <p:ext uri="{DAA4B4D4-6D71-4841-9C94-3DE7FCFB9230}">
-                <p14:media xmlns:p14="http://schemas.microsoft.com/office/powerpoint/2010/main" r:embed="rId1"/>
+                <p14:media xmlns:p14="http://schemas.microsoft.com/office/powerpoint/2010/main" r:embed="rId1">
+                  <p14:extLst>
+                    <p:ext uri="{3AFAAA56-56D3-431D-BCD4-E75A35582382}">
+                      <p173:tracksInfo xmlns:p173="http://schemas.microsoft.com/office/powerpoint/2017/3/main" displayLoc="slide">
+                        <p173:trackLst>
+                          <p173:track id="{DFF8F46D-8773-426D-831F-FA307C777DAD}" label="English (captions)" lang="en-US" r:embed="rId7"/>
+                        </p173:trackLst>
+                      </p173:tracksInfo>
+                    </p:ext>
+                  </p14:extLst>
+                </p14:media>
               </p:ext>
             </p:extLst>
           </p:nvPr>
@@ -8050,7 +8292,13 @@
       </p:sp>
       <p:sp>
         <p:nvSpPr>
-          <p:cNvPr id="3" name="Owner card"/>
+          <p:cNvPr id="3" name="Owner card" descr="">
+            <a:extLst>
+              <a:ext uri="{C183D7F6-B498-43B3-948B-1728B52AA6E4}">
+                <adec:decorative xmlns:adec="http://schemas.microsoft.com/office/drawing/2017/decorative" val="1"/>
+              </a:ext>
+            </a:extLst>
+          </p:cNvPr>
           <p:cNvSpPr/>
           <p:nvPr/>
         </p:nvSpPr>
@@ -8084,7 +8332,13 @@
       </p:sp>
       <p:sp>
         <p:nvSpPr>
-          <p:cNvPr id="4" name="Icon FaUserTie"/>
+          <p:cNvPr id="4" name="Icon FaUserTie" descr="">
+            <a:extLst>
+              <a:ext uri="{C183D7F6-B498-43B3-948B-1728B52AA6E4}">
+                <adec:decorative xmlns:adec="http://schemas.microsoft.com/office/drawing/2017/decorative" val="1"/>
+              </a:ext>
+            </a:extLst>
+          </p:cNvPr>
           <p:cNvSpPr/>
           <p:nvPr/>
         </p:nvSpPr>
@@ -8109,7 +8363,13 @@
       </p:sp>
       <p:pic>
         <p:nvPicPr>
-          <p:cNvPr id="5" name="Image 0" descr="C:\Users\whale\git\uiao\inbox\SSA-Interview\build\icons\FaUserTie.png"/>
+          <p:cNvPr id="5" name="Image 0" descr="">
+            <a:extLst>
+              <a:ext uri="{C183D7F6-B498-43B3-948B-1728B52AA6E4}">
+                <adec:decorative xmlns:adec="http://schemas.microsoft.com/office/drawing/2017/decorative" val="1"/>
+              </a:ext>
+            </a:extLst>
+          </p:cNvPr>
           <p:cNvPicPr>
             <a:picLocks noChangeAspect="1"/>
           </p:cNvPicPr>
@@ -8208,7 +8468,13 @@
       </p:sp>
       <p:sp>
         <p:nvSpPr>
-          <p:cNvPr id="8" name="Content card"/>
+          <p:cNvPr id="8" name="Content card" descr="">
+            <a:extLst>
+              <a:ext uri="{C183D7F6-B498-43B3-948B-1728B52AA6E4}">
+                <adec:decorative xmlns:adec="http://schemas.microsoft.com/office/drawing/2017/decorative" val="1"/>
+              </a:ext>
+            </a:extLst>
+          </p:cNvPr>
           <p:cNvSpPr/>
           <p:nvPr/>
         </p:nvSpPr>
@@ -8242,7 +8508,13 @@
       </p:sp>
       <p:sp>
         <p:nvSpPr>
-          <p:cNvPr id="9" name="Icon FaFileContract"/>
+          <p:cNvPr id="9" name="Icon FaFileContract" descr="">
+            <a:extLst>
+              <a:ext uri="{C183D7F6-B498-43B3-948B-1728B52AA6E4}">
+                <adec:decorative xmlns:adec="http://schemas.microsoft.com/office/drawing/2017/decorative" val="1"/>
+              </a:ext>
+            </a:extLst>
+          </p:cNvPr>
           <p:cNvSpPr/>
           <p:nvPr/>
         </p:nvSpPr>
@@ -8267,7 +8539,13 @@
       </p:sp>
       <p:pic>
         <p:nvPicPr>
-          <p:cNvPr id="10" name="Image 1" descr="C:\Users\whale\git\uiao\inbox\SSA-Interview\build\icons\FaFileContract.png"/>
+          <p:cNvPr id="10" name="Image 1" descr="">
+            <a:extLst>
+              <a:ext uri="{C183D7F6-B498-43B3-948B-1728B52AA6E4}">
+                <adec:decorative xmlns:adec="http://schemas.microsoft.com/office/drawing/2017/decorative" val="1"/>
+              </a:ext>
+            </a:extLst>
+          </p:cNvPr>
           <p:cNvPicPr>
             <a:picLocks noChangeAspect="1"/>
           </p:cNvPicPr>
@@ -8366,7 +8644,13 @@
       </p:sp>
       <p:sp>
         <p:nvSpPr>
-          <p:cNvPr id="13" name="Freshness card"/>
+          <p:cNvPr id="13" name="Freshness card" descr="">
+            <a:extLst>
+              <a:ext uri="{C183D7F6-B498-43B3-948B-1728B52AA6E4}">
+                <adec:decorative xmlns:adec="http://schemas.microsoft.com/office/drawing/2017/decorative" val="1"/>
+              </a:ext>
+            </a:extLst>
+          </p:cNvPr>
           <p:cNvSpPr/>
           <p:nvPr/>
         </p:nvSpPr>
@@ -8400,7 +8684,13 @@
       </p:sp>
       <p:sp>
         <p:nvSpPr>
-          <p:cNvPr id="14" name="Icon FaChartLine"/>
+          <p:cNvPr id="14" name="Icon FaChartLine" descr="">
+            <a:extLst>
+              <a:ext uri="{C183D7F6-B498-43B3-948B-1728B52AA6E4}">
+                <adec:decorative xmlns:adec="http://schemas.microsoft.com/office/drawing/2017/decorative" val="1"/>
+              </a:ext>
+            </a:extLst>
+          </p:cNvPr>
           <p:cNvSpPr/>
           <p:nvPr/>
         </p:nvSpPr>
@@ -8425,7 +8715,13 @@
       </p:sp>
       <p:pic>
         <p:nvPicPr>
-          <p:cNvPr id="15" name="Image 2" descr="C:\Users\whale\git\uiao\inbox\SSA-Interview\build\icons\FaChartLine.png"/>
+          <p:cNvPr id="15" name="Image 2" descr="">
+            <a:extLst>
+              <a:ext uri="{C183D7F6-B498-43B3-948B-1728B52AA6E4}">
+                <adec:decorative xmlns:adec="http://schemas.microsoft.com/office/drawing/2017/decorative" val="1"/>
+              </a:ext>
+            </a:extLst>
+          </p:cNvPr>
           <p:cNvPicPr>
             <a:picLocks noChangeAspect="1"/>
           </p:cNvPicPr>
@@ -8524,7 +8820,13 @@
       </p:sp>
       <p:sp>
         <p:nvSpPr>
-          <p:cNvPr id="18" name="Privacy basis card"/>
+          <p:cNvPr id="18" name="Privacy basis card" descr="">
+            <a:extLst>
+              <a:ext uri="{C183D7F6-B498-43B3-948B-1728B52AA6E4}">
+                <adec:decorative xmlns:adec="http://schemas.microsoft.com/office/drawing/2017/decorative" val="1"/>
+              </a:ext>
+            </a:extLst>
+          </p:cNvPr>
           <p:cNvSpPr/>
           <p:nvPr/>
         </p:nvSpPr>
@@ -8558,7 +8860,13 @@
       </p:sp>
       <p:sp>
         <p:nvSpPr>
-          <p:cNvPr id="19" name="Icon FaLock"/>
+          <p:cNvPr id="19" name="Icon FaLock" descr="">
+            <a:extLst>
+              <a:ext uri="{C183D7F6-B498-43B3-948B-1728B52AA6E4}">
+                <adec:decorative xmlns:adec="http://schemas.microsoft.com/office/drawing/2017/decorative" val="1"/>
+              </a:ext>
+            </a:extLst>
+          </p:cNvPr>
           <p:cNvSpPr/>
           <p:nvPr/>
         </p:nvSpPr>
@@ -8583,7 +8891,13 @@
       </p:sp>
       <p:pic>
         <p:nvPicPr>
-          <p:cNvPr id="20" name="Image 3" descr="C:\Users\whale\git\uiao\inbox\SSA-Interview\build\icons\FaLock.png"/>
+          <p:cNvPr id="20" name="Image 3" descr="">
+            <a:extLst>
+              <a:ext uri="{C183D7F6-B498-43B3-948B-1728B52AA6E4}">
+                <adec:decorative xmlns:adec="http://schemas.microsoft.com/office/drawing/2017/decorative" val="1"/>
+              </a:ext>
+            </a:extLst>
+          </p:cNvPr>
           <p:cNvPicPr>
             <a:picLocks noChangeAspect="1"/>
           </p:cNvPicPr>
@@ -8682,7 +8996,13 @@
       </p:sp>
       <p:sp>
         <p:nvSpPr>
-          <p:cNvPr id="23" name="Join on the key card"/>
+          <p:cNvPr id="23" name="Join on the key card" descr="">
+            <a:extLst>
+              <a:ext uri="{C183D7F6-B498-43B3-948B-1728B52AA6E4}">
+                <adec:decorative xmlns:adec="http://schemas.microsoft.com/office/drawing/2017/decorative" val="1"/>
+              </a:ext>
+            </a:extLst>
+          </p:cNvPr>
           <p:cNvSpPr/>
           <p:nvPr/>
         </p:nvSpPr>
@@ -8716,7 +9036,13 @@
       </p:sp>
       <p:sp>
         <p:nvSpPr>
-          <p:cNvPr id="24" name="Icon FaHashtag"/>
+          <p:cNvPr id="24" name="Icon FaHashtag" descr="">
+            <a:extLst>
+              <a:ext uri="{C183D7F6-B498-43B3-948B-1728B52AA6E4}">
+                <adec:decorative xmlns:adec="http://schemas.microsoft.com/office/drawing/2017/decorative" val="1"/>
+              </a:ext>
+            </a:extLst>
+          </p:cNvPr>
           <p:cNvSpPr/>
           <p:nvPr/>
         </p:nvSpPr>
@@ -8741,7 +9067,13 @@
       </p:sp>
       <p:pic>
         <p:nvPicPr>
-          <p:cNvPr id="25" name="Image 4" descr="C:\Users\whale\git\uiao\inbox\SSA-Interview\build\icons\FaHashtag.png"/>
+          <p:cNvPr id="25" name="Image 4" descr="">
+            <a:extLst>
+              <a:ext uri="{C183D7F6-B498-43B3-948B-1728B52AA6E4}">
+                <adec:decorative xmlns:adec="http://schemas.microsoft.com/office/drawing/2017/decorative" val="1"/>
+              </a:ext>
+            </a:extLst>
+          </p:cNvPr>
           <p:cNvPicPr>
             <a:picLocks noChangeAspect="1"/>
           </p:cNvPicPr>
@@ -8840,7 +9172,13 @@
       </p:sp>
       <p:sp>
         <p:nvSpPr>
-          <p:cNvPr id="28" name="Coverage card"/>
+          <p:cNvPr id="28" name="Coverage card" descr="">
+            <a:extLst>
+              <a:ext uri="{C183D7F6-B498-43B3-948B-1728B52AA6E4}">
+                <adec:decorative xmlns:adec="http://schemas.microsoft.com/office/drawing/2017/decorative" val="1"/>
+              </a:ext>
+            </a:extLst>
+          </p:cNvPr>
           <p:cNvSpPr/>
           <p:nvPr/>
         </p:nvSpPr>
@@ -8874,7 +9212,13 @@
       </p:sp>
       <p:sp>
         <p:nvSpPr>
-          <p:cNvPr id="29" name="Icon FaCircleQuestion"/>
+          <p:cNvPr id="29" name="Icon FaCircleQuestion" descr="">
+            <a:extLst>
+              <a:ext uri="{C183D7F6-B498-43B3-948B-1728B52AA6E4}">
+                <adec:decorative xmlns:adec="http://schemas.microsoft.com/office/drawing/2017/decorative" val="1"/>
+              </a:ext>
+            </a:extLst>
+          </p:cNvPr>
           <p:cNvSpPr/>
           <p:nvPr/>
         </p:nvSpPr>
@@ -8899,7 +9243,13 @@
       </p:sp>
       <p:pic>
         <p:nvPicPr>
-          <p:cNvPr id="30" name="Image 5" descr="C:\Users\whale\git\uiao\inbox\SSA-Interview\build\icons\FaCircleQuestion.png"/>
+          <p:cNvPr id="30" name="Image 5" descr="">
+            <a:extLst>
+              <a:ext uri="{C183D7F6-B498-43B3-948B-1728B52AA6E4}">
+                <adec:decorative xmlns:adec="http://schemas.microsoft.com/office/drawing/2017/decorative" val="1"/>
+              </a:ext>
+            </a:extLst>
+          </p:cNvPr>
           <p:cNvPicPr>
             <a:picLocks noChangeAspect="1"/>
           </p:cNvPicPr>
@@ -9079,7 +9429,7 @@
       </p:sp>
       <p:pic>
         <p:nvPicPr>
-          <p:cNvPr id="35" name="Narration">
+          <p:cNvPr id="35" name="Narration" descr="Narration for this slide; captions available" title="Narration">
             <a:hlinkClick r:id="" action="ppaction://media"/>
             <a:extLst>
               <a:ext uri="{FF2B5EF4-FFF2-40B4-BE49-F238E27FC236}">
@@ -9094,7 +9444,17 @@
             <a:audioFile r:link="rId2"/>
             <p:extLst>
               <p:ext uri="{DAA4B4D4-6D71-4841-9C94-3DE7FCFB9230}">
-                <p14:media xmlns:p14="http://schemas.microsoft.com/office/powerpoint/2010/main" r:embed="rId1"/>
+                <p14:media xmlns:p14="http://schemas.microsoft.com/office/powerpoint/2010/main" r:embed="rId1">
+                  <p14:extLst>
+                    <p:ext uri="{3AFAAA56-56D3-431D-BCD4-E75A35582382}">
+                      <p173:tracksInfo xmlns:p173="http://schemas.microsoft.com/office/powerpoint/2017/3/main" displayLoc="slide">
+                        <p173:trackLst>
+                          <p173:track id="{0E17A055-7F9B-41C2-B527-D74F0D959C9B}" label="English (captions)" lang="en-US" r:embed="rId12"/>
+                        </p173:trackLst>
+                      </p173:tracksInfo>
+                    </p:ext>
+                  </p14:extLst>
+                </p14:media>
               </p:ext>
             </p:extLst>
           </p:nvPr>
@@ -9261,7 +9621,13 @@
       </p:sp>
       <p:sp>
         <p:nvSpPr>
-          <p:cNvPr id="3" name="Now: read only card"/>
+          <p:cNvPr id="3" name="Now: read only card" descr="">
+            <a:extLst>
+              <a:ext uri="{C183D7F6-B498-43B3-948B-1728B52AA6E4}">
+                <adec:decorative xmlns:adec="http://schemas.microsoft.com/office/drawing/2017/decorative" val="1"/>
+              </a:ext>
+            </a:extLst>
+          </p:cNvPr>
           <p:cNvSpPr/>
           <p:nvPr/>
         </p:nvSpPr>
@@ -9295,7 +9661,13 @@
       </p:sp>
       <p:sp>
         <p:nvSpPr>
-          <p:cNvPr id="4" name="Icon FaListCheck"/>
+          <p:cNvPr id="4" name="Icon FaListCheck" descr="">
+            <a:extLst>
+              <a:ext uri="{C183D7F6-B498-43B3-948B-1728B52AA6E4}">
+                <adec:decorative xmlns:adec="http://schemas.microsoft.com/office/drawing/2017/decorative" val="1"/>
+              </a:ext>
+            </a:extLst>
+          </p:cNvPr>
           <p:cNvSpPr/>
           <p:nvPr/>
         </p:nvSpPr>
@@ -9320,7 +9692,13 @@
       </p:sp>
       <p:pic>
         <p:nvPicPr>
-          <p:cNvPr id="5" name="Image 0" descr="C:\Users\whale\git\uiao\inbox\SSA-Interview\build\icons\FaListCheck.png"/>
+          <p:cNvPr id="5" name="Image 0" descr="">
+            <a:extLst>
+              <a:ext uri="{C183D7F6-B498-43B3-948B-1728B52AA6E4}">
+                <adec:decorative xmlns:adec="http://schemas.microsoft.com/office/drawing/2017/decorative" val="1"/>
+              </a:ext>
+            </a:extLst>
+          </p:cNvPr>
           <p:cNvPicPr>
             <a:picLocks noChangeAspect="1"/>
           </p:cNvPicPr>
@@ -9459,7 +9837,13 @@
       </p:sp>
       <p:sp>
         <p:nvSpPr>
-          <p:cNvPr id="8" name="Shape 5"/>
+          <p:cNvPr id="8" name="Shape 5" descr="">
+            <a:extLst>
+              <a:ext uri="{C183D7F6-B498-43B3-948B-1728B52AA6E4}">
+                <adec:decorative xmlns:adec="http://schemas.microsoft.com/office/drawing/2017/decorative" val="1"/>
+              </a:ext>
+            </a:extLst>
+          </p:cNvPr>
           <p:cNvSpPr/>
           <p:nvPr/>
         </p:nvSpPr>
@@ -9483,7 +9867,13 @@
       </p:sp>
       <p:sp>
         <p:nvSpPr>
-          <p:cNvPr id="9" name="Before Core HCM card"/>
+          <p:cNvPr id="9" name="Before Core HCM card" descr="">
+            <a:extLst>
+              <a:ext uri="{C183D7F6-B498-43B3-948B-1728B52AA6E4}">
+                <adec:decorative xmlns:adec="http://schemas.microsoft.com/office/drawing/2017/decorative" val="1"/>
+              </a:ext>
+            </a:extLst>
+          </p:cNvPr>
           <p:cNvSpPr/>
           <p:nvPr/>
         </p:nvSpPr>
@@ -9517,7 +9907,13 @@
       </p:sp>
       <p:sp>
         <p:nvSpPr>
-          <p:cNvPr id="10" name="Icon FaUserShield"/>
+          <p:cNvPr id="10" name="Icon FaUserShield" descr="">
+            <a:extLst>
+              <a:ext uri="{C183D7F6-B498-43B3-948B-1728B52AA6E4}">
+                <adec:decorative xmlns:adec="http://schemas.microsoft.com/office/drawing/2017/decorative" val="1"/>
+              </a:ext>
+            </a:extLst>
+          </p:cNvPr>
           <p:cNvSpPr/>
           <p:nvPr/>
         </p:nvSpPr>
@@ -9542,7 +9938,13 @@
       </p:sp>
       <p:pic>
         <p:nvPicPr>
-          <p:cNvPr id="11" name="Image 1" descr="C:\Users\whale\git\uiao\inbox\SSA-Interview\build\icons\FaUserShield.png"/>
+          <p:cNvPr id="11" name="Image 1" descr="">
+            <a:extLst>
+              <a:ext uri="{C183D7F6-B498-43B3-948B-1728B52AA6E4}">
+                <adec:decorative xmlns:adec="http://schemas.microsoft.com/office/drawing/2017/decorative" val="1"/>
+              </a:ext>
+            </a:extLst>
+          </p:cNvPr>
           <p:cNvPicPr>
             <a:picLocks noChangeAspect="1"/>
           </p:cNvPicPr>
@@ -9681,7 +10083,13 @@
       </p:sp>
       <p:sp>
         <p:nvSpPr>
-          <p:cNvPr id="14" name="Shape 10"/>
+          <p:cNvPr id="14" name="Shape 10" descr="">
+            <a:extLst>
+              <a:ext uri="{C183D7F6-B498-43B3-948B-1728B52AA6E4}">
+                <adec:decorative xmlns:adec="http://schemas.microsoft.com/office/drawing/2017/decorative" val="1"/>
+              </a:ext>
+            </a:extLst>
+          </p:cNvPr>
           <p:cNvSpPr/>
           <p:nvPr/>
         </p:nvSpPr>
@@ -9705,7 +10113,13 @@
       </p:sp>
       <p:sp>
         <p:nvSpPr>
-          <p:cNvPr id="15" name="At Core HCM go-live card"/>
+          <p:cNvPr id="15" name="At Core HCM go-live card" descr="">
+            <a:extLst>
+              <a:ext uri="{C183D7F6-B498-43B3-948B-1728B52AA6E4}">
+                <adec:decorative xmlns:adec="http://schemas.microsoft.com/office/drawing/2017/decorative" val="1"/>
+              </a:ext>
+            </a:extLst>
+          </p:cNvPr>
           <p:cNvSpPr/>
           <p:nvPr/>
         </p:nvSpPr>
@@ -9739,7 +10153,13 @@
       </p:sp>
       <p:sp>
         <p:nvSpPr>
-          <p:cNvPr id="16" name="Icon FaRoute"/>
+          <p:cNvPr id="16" name="Icon FaRoute" descr="">
+            <a:extLst>
+              <a:ext uri="{C183D7F6-B498-43B3-948B-1728B52AA6E4}">
+                <adec:decorative xmlns:adec="http://schemas.microsoft.com/office/drawing/2017/decorative" val="1"/>
+              </a:ext>
+            </a:extLst>
+          </p:cNvPr>
           <p:cNvSpPr/>
           <p:nvPr/>
         </p:nvSpPr>
@@ -9764,7 +10184,13 @@
       </p:sp>
       <p:pic>
         <p:nvPicPr>
-          <p:cNvPr id="17" name="Image 2" descr="C:\Users\whale\git\uiao\inbox\SSA-Interview\build\icons\FaRoute.png"/>
+          <p:cNvPr id="17" name="Image 2" descr="">
+            <a:extLst>
+              <a:ext uri="{C183D7F6-B498-43B3-948B-1728B52AA6E4}">
+                <adec:decorative xmlns:adec="http://schemas.microsoft.com/office/drawing/2017/decorative" val="1"/>
+              </a:ext>
+            </a:extLst>
+          </p:cNvPr>
           <p:cNvPicPr>
             <a:picLocks noChangeAspect="1"/>
           </p:cNvPicPr>
@@ -9903,7 +10329,13 @@
       </p:sp>
       <p:sp>
         <p:nvSpPr>
-          <p:cNvPr id="20" name="Ask band"/>
+          <p:cNvPr id="20" name="Ask band" descr="">
+            <a:extLst>
+              <a:ext uri="{C183D7F6-B498-43B3-948B-1728B52AA6E4}">
+                <adec:decorative xmlns:adec="http://schemas.microsoft.com/office/drawing/2017/decorative" val="1"/>
+              </a:ext>
+            </a:extLst>
+          </p:cNvPr>
           <p:cNvSpPr/>
           <p:nvPr/>
         </p:nvSpPr>
@@ -10026,7 +10458,7 @@
       </p:sp>
       <p:pic>
         <p:nvPicPr>
-          <p:cNvPr id="22" name="Narration">
+          <p:cNvPr id="22" name="Narration" descr="Narration for this slide; captions available" title="Narration">
             <a:hlinkClick r:id="" action="ppaction://media"/>
             <a:extLst>
               <a:ext uri="{FF2B5EF4-FFF2-40B4-BE49-F238E27FC236}">
@@ -10041,7 +10473,17 @@
             <a:audioFile r:link="rId2"/>
             <p:extLst>
               <p:ext uri="{DAA4B4D4-6D71-4841-9C94-3DE7FCFB9230}">
-                <p14:media xmlns:p14="http://schemas.microsoft.com/office/powerpoint/2010/main" r:embed="rId1"/>
+                <p14:media xmlns:p14="http://schemas.microsoft.com/office/powerpoint/2010/main" r:embed="rId1">
+                  <p14:extLst>
+                    <p:ext uri="{3AFAAA56-56D3-431D-BCD4-E75A35582382}">
+                      <p173:tracksInfo xmlns:p173="http://schemas.microsoft.com/office/powerpoint/2017/3/main" displayLoc="slide">
+                        <p173:trackLst>
+                          <p173:track id="{0224D260-3183-4C63-A0C0-845E52042D72}" label="English (captions)" lang="en-US" r:embed="rId9"/>
+                        </p173:trackLst>
+                      </p173:tracksInfo>
+                    </p:ext>
+                  </p14:extLst>
+                </p14:media>
               </p:ext>
             </p:extLst>
           </p:nvPr>

--- a/presentations/hr-driven-identity-interview/HR_Driven_Identity_Contractor_Source_AnyAgency_Narrated.pptx
+++ b/presentations/hr-driven-identity-interview/HR_Driven_Identity_Contractor_Source_AnyAgency_Narrated.pptx
@@ -170,7 +170,7 @@
     </p:spTree>
     <p:extLst>
       <p:ext uri="{BB962C8B-B14F-4D97-AF65-F5344CB8AC3E}">
-        <p14:creationId xmlns:p14="http://schemas.microsoft.com/office/powerpoint/2010/main" val="3671036344"/>
+        <p14:creationId xmlns:p14="http://schemas.microsoft.com/office/powerpoint/2010/main" val="2832734823"/>
       </p:ext>
     </p:extLst>
   </p:cSld>
@@ -1748,11 +1748,11 @@
       </p:sp>
       <p:pic>
         <p:nvPicPr>
-          <p:cNvPr id="6" name="Narration" descr="Narration for this slide; captions available" title="Narration">
+          <p:cNvPr id="6" name="Narration" descr="Narration for this slide; captions available">
             <a:hlinkClick r:id="" action="ppaction://media"/>
             <a:extLst>
               <a:ext uri="{FF2B5EF4-FFF2-40B4-BE49-F238E27FC236}">
-                <a16:creationId xmlns:a16="http://schemas.microsoft.com/office/drawing/2014/main" id="{3F94C2F6-D654-B6AD-7E78-CD965EF4266B}"/>
+                <a16:creationId xmlns:a16="http://schemas.microsoft.com/office/drawing/2014/main" id="{F06562BE-27D5-3EA4-3A71-F3D5AD034E92}"/>
               </a:ext>
             </a:extLst>
           </p:cNvPr>
@@ -1768,7 +1768,7 @@
                     <p:ext uri="{3AFAAA56-56D3-431D-BCD4-E75A35582382}">
                       <p173:tracksInfo xmlns:p173="http://schemas.microsoft.com/office/powerpoint/2017/3/main" displayLoc="slide">
                         <p173:trackLst>
-                          <p173:track id="{11BA3BBF-1F2B-4491-BA4F-7E04FB782281}" label="English (captions)" lang="en-US" r:embed="rId6"/>
+                          <p173:track id="{FFE94263-9C2E-4940-B560-056D37AE0D38}" label="English (captions)" lang="en-US" r:embed="rId6"/>
                         </p173:trackLst>
                       </p173:tracksInfo>
                     </p:ext>
@@ -1801,10 +1801,10 @@
   </p:clrMapOvr>
   <mc:AlternateContent xmlns:mc="http://schemas.openxmlformats.org/markup-compatibility/2006">
     <mc:Choice xmlns:p14="http://schemas.microsoft.com/office/powerpoint/2010/main" Requires="p14">
-      <p:transition spd="slow" p14:dur="2000" advTm="45860"/>
+      <p:transition spd="slow" p14:dur="2000" advTm="46460"/>
     </mc:Choice>
     <mc:Fallback>
-      <p:transition spd="slow" advTm="45860"/>
+      <p:transition spd="slow" advTm="46460"/>
     </mc:Fallback>
   </mc:AlternateContent>
   <p:timing>
@@ -1838,7 +1838,7 @@
                                   <p:childTnLst>
                                     <p:cmd type="call" cmd="playFrom(0.0)">
                                       <p:cBhvr>
-                                        <p:cTn id="6" dur="44856" fill="hold"/>
+                                        <p:cTn id="6" dur="45456" fill="hold"/>
                                         <p:tgtEl>
                                           <p:spTgt spid="6"/>
                                         </p:tgtEl>
@@ -1940,7 +1940,7 @@
       </p:sp>
       <p:sp>
         <p:nvSpPr>
-          <p:cNvPr id="3" name="Core HCM scope card" descr="">
+          <p:cNvPr id="3" name="Core HCM scope card">
             <a:extLst>
               <a:ext uri="{C183D7F6-B498-43B3-948B-1728B52AA6E4}">
                 <adec:decorative xmlns:adec="http://schemas.microsoft.com/office/drawing/2017/decorative" val="1"/>
@@ -1980,7 +1980,7 @@
       </p:sp>
       <p:sp>
         <p:nvSpPr>
-          <p:cNvPr id="4" name="Icon FaBuildingColumns" descr="">
+          <p:cNvPr id="4" name="Icon FaBuildingColumns">
             <a:extLst>
               <a:ext uri="{C183D7F6-B498-43B3-948B-1728B52AA6E4}">
                 <adec:decorative xmlns:adec="http://schemas.microsoft.com/office/drawing/2017/decorative" val="1"/>
@@ -2011,7 +2011,7 @@
       </p:sp>
       <p:pic>
         <p:nvPicPr>
-          <p:cNvPr id="5" name="Image 0" descr="">
+          <p:cNvPr id="5" name="Image 0">
             <a:extLst>
               <a:ext uri="{C183D7F6-B498-43B3-948B-1728B52AA6E4}">
                 <adec:decorative xmlns:adec="http://schemas.microsoft.com/office/drawing/2017/decorative" val="1"/>
@@ -2156,7 +2156,7 @@
       </p:sp>
       <p:sp>
         <p:nvSpPr>
-          <p:cNvPr id="8" name="Today (observed) card" descr="">
+          <p:cNvPr id="8" name="Today (observed) card">
             <a:extLst>
               <a:ext uri="{C183D7F6-B498-43B3-948B-1728B52AA6E4}">
                 <adec:decorative xmlns:adec="http://schemas.microsoft.com/office/drawing/2017/decorative" val="1"/>
@@ -2196,7 +2196,7 @@
       </p:sp>
       <p:sp>
         <p:nvSpPr>
-          <p:cNvPr id="9" name="Icon FaTableList" descr="">
+          <p:cNvPr id="9" name="Icon FaTableList">
             <a:extLst>
               <a:ext uri="{C183D7F6-B498-43B3-948B-1728B52AA6E4}">
                 <adec:decorative xmlns:adec="http://schemas.microsoft.com/office/drawing/2017/decorative" val="1"/>
@@ -2227,7 +2227,7 @@
       </p:sp>
       <p:pic>
         <p:nvPicPr>
-          <p:cNvPr id="10" name="Image 1" descr="">
+          <p:cNvPr id="10" name="Image 1">
             <a:extLst>
               <a:ext uri="{C183D7F6-B498-43B3-948B-1728B52AA6E4}">
                 <adec:decorative xmlns:adec="http://schemas.microsoft.com/office/drawing/2017/decorative" val="1"/>
@@ -2372,7 +2372,7 @@
       </p:sp>
       <p:sp>
         <p:nvSpPr>
-          <p:cNvPr id="13" name="Guidance conflict card" descr="">
+          <p:cNvPr id="13" name="Guidance conflict card">
             <a:extLst>
               <a:ext uri="{C183D7F6-B498-43B3-948B-1728B52AA6E4}">
                 <adec:decorative xmlns:adec="http://schemas.microsoft.com/office/drawing/2017/decorative" val="1"/>
@@ -2412,7 +2412,7 @@
       </p:sp>
       <p:sp>
         <p:nvSpPr>
-          <p:cNvPr id="14" name="Icon FaScaleBalanced" descr="">
+          <p:cNvPr id="14" name="Icon FaScaleBalanced">
             <a:extLst>
               <a:ext uri="{C183D7F6-B498-43B3-948B-1728B52AA6E4}">
                 <adec:decorative xmlns:adec="http://schemas.microsoft.com/office/drawing/2017/decorative" val="1"/>
@@ -2443,7 +2443,7 @@
       </p:sp>
       <p:pic>
         <p:nvPicPr>
-          <p:cNvPr id="15" name="Image 2" descr="">
+          <p:cNvPr id="15" name="Image 2">
             <a:extLst>
               <a:ext uri="{C183D7F6-B498-43B3-948B-1728B52AA6E4}">
                 <adec:decorative xmlns:adec="http://schemas.microsoft.com/office/drawing/2017/decorative" val="1"/>
@@ -2588,7 +2588,7 @@
       </p:sp>
       <p:sp>
         <p:nvSpPr>
-          <p:cNvPr id="18" name="Question band" descr="">
+          <p:cNvPr id="18" name="Question band">
             <a:extLst>
               <a:ext uri="{C183D7F6-B498-43B3-948B-1728B52AA6E4}">
                 <adec:decorative xmlns:adec="http://schemas.microsoft.com/office/drawing/2017/decorative" val="1"/>
@@ -2717,11 +2717,11 @@
       </p:sp>
       <p:pic>
         <p:nvPicPr>
-          <p:cNvPr id="20" name="Narration" descr="Narration for this slide; captions available" title="Narration">
+          <p:cNvPr id="20" name="Narration" descr="Narration for this slide; captions available">
             <a:hlinkClick r:id="" action="ppaction://media"/>
             <a:extLst>
               <a:ext uri="{FF2B5EF4-FFF2-40B4-BE49-F238E27FC236}">
-                <a16:creationId xmlns:a16="http://schemas.microsoft.com/office/drawing/2014/main" id="{60576C90-3D9F-53B3-ED0B-F3D1C8FDE44D}"/>
+                <a16:creationId xmlns:a16="http://schemas.microsoft.com/office/drawing/2014/main" id="{C624C934-39AF-D1D5-0CF0-60475106D2E6}"/>
               </a:ext>
             </a:extLst>
           </p:cNvPr>
@@ -2737,7 +2737,7 @@
                     <p:ext uri="{3AFAAA56-56D3-431D-BCD4-E75A35582382}">
                       <p173:tracksInfo xmlns:p173="http://schemas.microsoft.com/office/powerpoint/2017/3/main" displayLoc="slide">
                         <p173:trackLst>
-                          <p173:track id="{3F6CCFA3-8299-4786-A7AC-600085D2AEA1}" label="English (captions)" lang="en-US" r:embed="rId9"/>
+                          <p173:track id="{4F48180B-6028-4517-9A23-C7A72EFD5020}" label="English (captions)" lang="en-US" r:embed="rId9"/>
                         </p173:trackLst>
                       </p173:tracksInfo>
                     </p:ext>
@@ -2770,10 +2770,10 @@
   </p:clrMapOvr>
   <mc:AlternateContent xmlns:mc="http://schemas.openxmlformats.org/markup-compatibility/2006">
     <mc:Choice xmlns:p14="http://schemas.microsoft.com/office/powerpoint/2010/main" Requires="p14">
-      <p:transition spd="slow" p14:dur="2000" advTm="72740"/>
+      <p:transition spd="slow" p14:dur="2000" advTm="97600"/>
     </mc:Choice>
     <mc:Fallback>
-      <p:transition spd="slow" advTm="72740"/>
+      <p:transition spd="slow" advTm="97600"/>
     </mc:Fallback>
   </mc:AlternateContent>
   <p:timing>
@@ -2807,7 +2807,7 @@
                                   <p:childTnLst>
                                     <p:cmd type="call" cmd="playFrom(0.0)">
                                       <p:cBhvr>
-                                        <p:cTn id="6" dur="71736" fill="hold"/>
+                                        <p:cTn id="6" dur="96600" fill="hold"/>
                                         <p:tgtEl>
                                           <p:spTgt spid="20"/>
                                         </p:tgtEl>
@@ -2909,7 +2909,7 @@
       </p:sp>
       <p:sp>
         <p:nvSpPr>
-          <p:cNvPr id="3" name="COR spreadsheets box" descr="">
+          <p:cNvPr id="3" name="COR spreadsheets box">
             <a:extLst>
               <a:ext uri="{C183D7F6-B498-43B3-948B-1728B52AA6E4}">
                 <adec:decorative xmlns:adec="http://schemas.microsoft.com/office/drawing/2017/decorative" val="1"/>
@@ -2949,7 +2949,7 @@
       </p:sp>
       <p:sp>
         <p:nvSpPr>
-          <p:cNvPr id="4" name="Icon FaTableList" descr="">
+          <p:cNvPr id="4" name="Icon FaTableList">
             <a:extLst>
               <a:ext uri="{C183D7F6-B498-43B3-948B-1728B52AA6E4}">
                 <adec:decorative xmlns:adec="http://schemas.microsoft.com/office/drawing/2017/decorative" val="1"/>
@@ -2980,7 +2980,7 @@
       </p:sp>
       <p:pic>
         <p:nvPicPr>
-          <p:cNvPr id="5" name="Image 0" descr="">
+          <p:cNvPr id="5" name="Image 0">
             <a:extLst>
               <a:ext uri="{C183D7F6-B498-43B3-948B-1728B52AA6E4}">
                 <adec:decorative xmlns:adec="http://schemas.microsoft.com/office/drawing/2017/decorative" val="1"/>
@@ -3085,7 +3085,7 @@
       </p:sp>
       <p:sp>
         <p:nvSpPr>
-          <p:cNvPr id="8" name="Shape 5" descr="">
+          <p:cNvPr id="8" name="Shape 5">
             <a:extLst>
               <a:ext uri="{C183D7F6-B498-43B3-948B-1728B52AA6E4}">
                 <adec:decorative xmlns:adec="http://schemas.microsoft.com/office/drawing/2017/decorative" val="1"/>
@@ -3114,7 +3114,7 @@
       </p:sp>
       <p:sp>
         <p:nvSpPr>
-          <p:cNvPr id="9" name="Contractor suitability register box" descr="">
+          <p:cNvPr id="9" name="Contractor suitability register box">
             <a:extLst>
               <a:ext uri="{C183D7F6-B498-43B3-948B-1728B52AA6E4}">
                 <adec:decorative xmlns:adec="http://schemas.microsoft.com/office/drawing/2017/decorative" val="1"/>
@@ -3154,7 +3154,7 @@
       </p:sp>
       <p:sp>
         <p:nvSpPr>
-          <p:cNvPr id="10" name="Icon FaFileContract" descr="">
+          <p:cNvPr id="10" name="Icon FaFileContract">
             <a:extLst>
               <a:ext uri="{C183D7F6-B498-43B3-948B-1728B52AA6E4}">
                 <adec:decorative xmlns:adec="http://schemas.microsoft.com/office/drawing/2017/decorative" val="1"/>
@@ -3185,7 +3185,7 @@
       </p:sp>
       <p:pic>
         <p:nvPicPr>
-          <p:cNvPr id="11" name="Image 1" descr="">
+          <p:cNvPr id="11" name="Image 1">
             <a:extLst>
               <a:ext uri="{C183D7F6-B498-43B3-948B-1728B52AA6E4}">
                 <adec:decorative xmlns:adec="http://schemas.microsoft.com/office/drawing/2017/decorative" val="1"/>
@@ -3290,7 +3290,7 @@
       </p:sp>
       <p:sp>
         <p:nvSpPr>
-          <p:cNvPr id="14" name="Shape 10" descr="">
+          <p:cNvPr id="14" name="Shape 10">
             <a:extLst>
               <a:ext uri="{C183D7F6-B498-43B3-948B-1728B52AA6E4}">
                 <adec:decorative xmlns:adec="http://schemas.microsoft.com/office/drawing/2017/decorative" val="1"/>
@@ -3319,7 +3319,7 @@
       </p:sp>
       <p:sp>
         <p:nvSpPr>
-          <p:cNvPr id="15" name="PIV enrollment box" descr="">
+          <p:cNvPr id="15" name="PIV enrollment box">
             <a:extLst>
               <a:ext uri="{C183D7F6-B498-43B3-948B-1728B52AA6E4}">
                 <adec:decorative xmlns:adec="http://schemas.microsoft.com/office/drawing/2017/decorative" val="1"/>
@@ -3359,7 +3359,7 @@
       </p:sp>
       <p:sp>
         <p:nvSpPr>
-          <p:cNvPr id="16" name="Icon FaIdCard" descr="">
+          <p:cNvPr id="16" name="Icon FaIdCard">
             <a:extLst>
               <a:ext uri="{C183D7F6-B498-43B3-948B-1728B52AA6E4}">
                 <adec:decorative xmlns:adec="http://schemas.microsoft.com/office/drawing/2017/decorative" val="1"/>
@@ -3390,7 +3390,7 @@
       </p:sp>
       <p:pic>
         <p:nvPicPr>
-          <p:cNvPr id="17" name="Image 2" descr="">
+          <p:cNvPr id="17" name="Image 2">
             <a:extLst>
               <a:ext uri="{C183D7F6-B498-43B3-948B-1728B52AA6E4}">
                 <adec:decorative xmlns:adec="http://schemas.microsoft.com/office/drawing/2017/decorative" val="1"/>
@@ -3495,7 +3495,7 @@
       </p:sp>
       <p:sp>
         <p:nvSpPr>
-          <p:cNvPr id="20" name="Shape 15" descr="">
+          <p:cNvPr id="20" name="Shape 15">
             <a:extLst>
               <a:ext uri="{C183D7F6-B498-43B3-948B-1728B52AA6E4}">
                 <adec:decorative xmlns:adec="http://schemas.microsoft.com/office/drawing/2017/decorative" val="1"/>
@@ -3524,7 +3524,7 @@
       </p:sp>
       <p:sp>
         <p:nvSpPr>
-          <p:cNvPr id="21" name="Shape 16" descr="">
+          <p:cNvPr id="21" name="Shape 16">
             <a:extLst>
               <a:ext uri="{C183D7F6-B498-43B3-948B-1728B52AA6E4}">
                 <adec:decorative xmlns:adec="http://schemas.microsoft.com/office/drawing/2017/decorative" val="1"/>
@@ -3553,7 +3553,7 @@
       </p:sp>
       <p:sp>
         <p:nvSpPr>
-          <p:cNvPr id="22" name="Shape 17" descr="">
+          <p:cNvPr id="22" name="Shape 17">
             <a:extLst>
               <a:ext uri="{C183D7F6-B498-43B3-948B-1728B52AA6E4}">
                 <adec:decorative xmlns:adec="http://schemas.microsoft.com/office/drawing/2017/decorative" val="1"/>
@@ -3618,7 +3618,7 @@
       </p:sp>
       <p:sp>
         <p:nvSpPr>
-          <p:cNvPr id="24" name="Directory box" descr="">
+          <p:cNvPr id="24" name="Directory box">
             <a:extLst>
               <a:ext uri="{C183D7F6-B498-43B3-948B-1728B52AA6E4}">
                 <adec:decorative xmlns:adec="http://schemas.microsoft.com/office/drawing/2017/decorative" val="1"/>
@@ -3658,7 +3658,7 @@
       </p:sp>
       <p:sp>
         <p:nvSpPr>
-          <p:cNvPr id="25" name="Icon FaCloud" descr="">
+          <p:cNvPr id="25" name="Icon FaCloud">
             <a:extLst>
               <a:ext uri="{C183D7F6-B498-43B3-948B-1728B52AA6E4}">
                 <adec:decorative xmlns:adec="http://schemas.microsoft.com/office/drawing/2017/decorative" val="1"/>
@@ -3689,7 +3689,7 @@
       </p:sp>
       <p:pic>
         <p:nvPicPr>
-          <p:cNvPr id="26" name="Image 3" descr="">
+          <p:cNvPr id="26" name="Image 3">
             <a:extLst>
               <a:ext uri="{C183D7F6-B498-43B3-948B-1728B52AA6E4}">
                 <adec:decorative xmlns:adec="http://schemas.microsoft.com/office/drawing/2017/decorative" val="1"/>
@@ -3794,7 +3794,7 @@
       </p:sp>
       <p:sp>
         <p:nvSpPr>
-          <p:cNvPr id="29" name="Later band" descr="">
+          <p:cNvPr id="29" name="Later band">
             <a:extLst>
               <a:ext uri="{C183D7F6-B498-43B3-948B-1728B52AA6E4}">
                 <adec:decorative xmlns:adec="http://schemas.microsoft.com/office/drawing/2017/decorative" val="1"/>
@@ -3923,11 +3923,11 @@
       </p:sp>
       <p:pic>
         <p:nvPicPr>
-          <p:cNvPr id="32" name="Narration" descr="Narration for this slide; captions available" title="Narration">
+          <p:cNvPr id="32" name="Narration" descr="Narration for this slide; captions available">
             <a:hlinkClick r:id="" action="ppaction://media"/>
             <a:extLst>
               <a:ext uri="{FF2B5EF4-FFF2-40B4-BE49-F238E27FC236}">
-                <a16:creationId xmlns:a16="http://schemas.microsoft.com/office/drawing/2014/main" id="{08C34F98-C849-3EF6-3787-D19EB5B0C476}"/>
+                <a16:creationId xmlns:a16="http://schemas.microsoft.com/office/drawing/2014/main" id="{ED611C78-AFA8-E6BE-54E8-0A0381D6F04F}"/>
               </a:ext>
             </a:extLst>
           </p:cNvPr>
@@ -3943,7 +3943,7 @@
                     <p:ext uri="{3AFAAA56-56D3-431D-BCD4-E75A35582382}">
                       <p173:tracksInfo xmlns:p173="http://schemas.microsoft.com/office/powerpoint/2017/3/main" displayLoc="slide">
                         <p173:trackLst>
-                          <p173:track id="{ED7CAB98-E2E2-4E96-99D6-046E8153EA94}" label="English (captions)" lang="en-US" r:embed="rId10"/>
+                          <p173:track id="{16C12A33-BFB4-4F56-AF8F-9081687DC59F}" label="English (captions)" lang="en-US" r:embed="rId10"/>
                         </p173:trackLst>
                       </p173:tracksInfo>
                     </p:ext>
@@ -3976,10 +3976,10 @@
   </p:clrMapOvr>
   <mc:AlternateContent xmlns:mc="http://schemas.openxmlformats.org/markup-compatibility/2006">
     <mc:Choice xmlns:p14="http://schemas.microsoft.com/office/powerpoint/2010/main" Requires="p14">
-      <p:transition spd="slow" p14:dur="2000" advTm="78880"/>
+      <p:transition spd="slow" p14:dur="2000" advTm="95730"/>
     </mc:Choice>
     <mc:Fallback>
-      <p:transition spd="slow" advTm="78880"/>
+      <p:transition spd="slow" advTm="95730"/>
     </mc:Fallback>
   </mc:AlternateContent>
   <p:timing>
@@ -4013,7 +4013,7 @@
                                   <p:childTnLst>
                                     <p:cmd type="call" cmd="playFrom(0.0)">
                                       <p:cBhvr>
-                                        <p:cTn id="6" dur="77880" fill="hold"/>
+                                        <p:cTn id="6" dur="94728" fill="hold"/>
                                         <p:tgtEl>
                                           <p:spTgt spid="32"/>
                                         </p:tgtEl>
@@ -6260,7 +6260,7 @@
       </p:graphicFrame>
       <p:sp>
         <p:nvSpPr>
-          <p:cNvPr id="4" name="Takeaway band" descr="">
+          <p:cNvPr id="4" name="Takeaway band">
             <a:extLst>
               <a:ext uri="{C183D7F6-B498-43B3-948B-1728B52AA6E4}">
                 <adec:decorative xmlns:adec="http://schemas.microsoft.com/office/drawing/2017/decorative" val="1"/>
@@ -6389,11 +6389,11 @@
       </p:sp>
       <p:pic>
         <p:nvPicPr>
-          <p:cNvPr id="6" name="Narration" descr="Narration for this slide; captions available" title="Narration">
+          <p:cNvPr id="6" name="Narration" descr="Narration for this slide; captions available">
             <a:hlinkClick r:id="" action="ppaction://media"/>
             <a:extLst>
               <a:ext uri="{FF2B5EF4-FFF2-40B4-BE49-F238E27FC236}">
-                <a16:creationId xmlns:a16="http://schemas.microsoft.com/office/drawing/2014/main" id="{7872FAAC-D346-18D8-BEA6-E7C588026988}"/>
+                <a16:creationId xmlns:a16="http://schemas.microsoft.com/office/drawing/2014/main" id="{6B9E5776-4F09-857A-0808-0A6CC3DBA723}"/>
               </a:ext>
             </a:extLst>
           </p:cNvPr>
@@ -6409,7 +6409,7 @@
                     <p:ext uri="{3AFAAA56-56D3-431D-BCD4-E75A35582382}">
                       <p173:tracksInfo xmlns:p173="http://schemas.microsoft.com/office/powerpoint/2017/3/main" displayLoc="slide">
                         <p173:trackLst>
-                          <p173:track id="{8E6BAB3A-E5F0-4BC6-A7E9-575D84550ED6}" label="English (captions)" lang="en-US" r:embed="rId6"/>
+                          <p173:track id="{B5BDF2D8-B871-4DAF-A512-B9BC5513EBD9}" label="English (captions)" lang="en-US" r:embed="rId6"/>
                         </p173:trackLst>
                       </p173:tracksInfo>
                     </p:ext>
@@ -6442,10 +6442,10 @@
   </p:clrMapOvr>
   <mc:AlternateContent xmlns:mc="http://schemas.openxmlformats.org/markup-compatibility/2006">
     <mc:Choice xmlns:p14="http://schemas.microsoft.com/office/powerpoint/2010/main" Requires="p14">
-      <p:transition spd="slow" p14:dur="2000" advTm="64650"/>
+      <p:transition spd="slow" p14:dur="2000" advTm="64860"/>
     </mc:Choice>
     <mc:Fallback>
-      <p:transition spd="slow" advTm="64650"/>
+      <p:transition spd="slow" advTm="64860"/>
     </mc:Fallback>
   </mc:AlternateContent>
   <p:timing>
@@ -6479,7 +6479,7 @@
                                   <p:childTnLst>
                                     <p:cmd type="call" cmd="playFrom(0.0)">
                                       <p:cBhvr>
-                                        <p:cTn id="6" dur="63648" fill="hold"/>
+                                        <p:cTn id="6" dur="63864" fill="hold"/>
                                         <p:tgtEl>
                                           <p:spTgt spid="6"/>
                                         </p:tgtEl>
@@ -7767,7 +7767,7 @@
       </p:graphicFrame>
       <p:sp>
         <p:nvSpPr>
-          <p:cNvPr id="4" name="Leaver card" descr="">
+          <p:cNvPr id="4" name="Leaver card">
             <a:extLst>
               <a:ext uri="{C183D7F6-B498-43B3-948B-1728B52AA6E4}">
                 <adec:decorative xmlns:adec="http://schemas.microsoft.com/office/drawing/2017/decorative" val="1"/>
@@ -7807,7 +7807,7 @@
       </p:sp>
       <p:sp>
         <p:nvSpPr>
-          <p:cNvPr id="5" name="Icon FaUserXmark" descr="">
+          <p:cNvPr id="5" name="Icon FaUserXmark">
             <a:extLst>
               <a:ext uri="{C183D7F6-B498-43B3-948B-1728B52AA6E4}">
                 <adec:decorative xmlns:adec="http://schemas.microsoft.com/office/drawing/2017/decorative" val="1"/>
@@ -7838,7 +7838,7 @@
       </p:sp>
       <p:pic>
         <p:nvPicPr>
-          <p:cNvPr id="3" name="Image 0" descr="">
+          <p:cNvPr id="3" name="Image 0">
             <a:extLst>
               <a:ext uri="{C183D7F6-B498-43B3-948B-1728B52AA6E4}">
                 <adec:decorative xmlns:adec="http://schemas.microsoft.com/office/drawing/2017/decorative" val="1"/>
@@ -8100,11 +8100,11 @@
       </p:sp>
       <p:pic>
         <p:nvPicPr>
-          <p:cNvPr id="10" name="Narration" descr="Narration for this slide; captions available" title="Narration">
+          <p:cNvPr id="10" name="Narration" descr="Narration for this slide; captions available">
             <a:hlinkClick r:id="" action="ppaction://media"/>
             <a:extLst>
               <a:ext uri="{FF2B5EF4-FFF2-40B4-BE49-F238E27FC236}">
-                <a16:creationId xmlns:a16="http://schemas.microsoft.com/office/drawing/2014/main" id="{48978FD8-B28F-9498-8412-6082F7A84BF2}"/>
+                <a16:creationId xmlns:a16="http://schemas.microsoft.com/office/drawing/2014/main" id="{64175D36-241C-F440-22A3-971D0BB6EA3F}"/>
               </a:ext>
             </a:extLst>
           </p:cNvPr>
@@ -8120,7 +8120,7 @@
                     <p:ext uri="{3AFAAA56-56D3-431D-BCD4-E75A35582382}">
                       <p173:tracksInfo xmlns:p173="http://schemas.microsoft.com/office/powerpoint/2017/3/main" displayLoc="slide">
                         <p173:trackLst>
-                          <p173:track id="{DFF8F46D-8773-426D-831F-FA307C777DAD}" label="English (captions)" lang="en-US" r:embed="rId7"/>
+                          <p173:track id="{B5BC4ACD-147B-49A8-BD9C-E0A1A7CFA5F2}" label="English (captions)" lang="en-US" r:embed="rId7"/>
                         </p173:trackLst>
                       </p173:tracksInfo>
                     </p:ext>
@@ -8153,10 +8153,10 @@
   </p:clrMapOvr>
   <mc:AlternateContent xmlns:mc="http://schemas.openxmlformats.org/markup-compatibility/2006">
     <mc:Choice xmlns:p14="http://schemas.microsoft.com/office/powerpoint/2010/main" Requires="p14">
-      <p:transition spd="slow" p14:dur="2000" advTm="97620"/>
+      <p:transition spd="slow" p14:dur="2000" advTm="120540"/>
     </mc:Choice>
     <mc:Fallback>
-      <p:transition spd="slow" advTm="97620"/>
+      <p:transition spd="slow" advTm="120540"/>
     </mc:Fallback>
   </mc:AlternateContent>
   <p:timing>
@@ -8190,7 +8190,7 @@
                                   <p:childTnLst>
                                     <p:cmd type="call" cmd="playFrom(0.0)">
                                       <p:cBhvr>
-                                        <p:cTn id="6" dur="96624" fill="hold"/>
+                                        <p:cTn id="6" dur="119544" fill="hold"/>
                                         <p:tgtEl>
                                           <p:spTgt spid="10"/>
                                         </p:tgtEl>
@@ -8292,7 +8292,7 @@
       </p:sp>
       <p:sp>
         <p:nvSpPr>
-          <p:cNvPr id="3" name="Owner card" descr="">
+          <p:cNvPr id="3" name="Owner card">
             <a:extLst>
               <a:ext uri="{C183D7F6-B498-43B3-948B-1728B52AA6E4}">
                 <adec:decorative xmlns:adec="http://schemas.microsoft.com/office/drawing/2017/decorative" val="1"/>
@@ -8332,7 +8332,7 @@
       </p:sp>
       <p:sp>
         <p:nvSpPr>
-          <p:cNvPr id="4" name="Icon FaUserTie" descr="">
+          <p:cNvPr id="4" name="Icon FaUserTie">
             <a:extLst>
               <a:ext uri="{C183D7F6-B498-43B3-948B-1728B52AA6E4}">
                 <adec:decorative xmlns:adec="http://schemas.microsoft.com/office/drawing/2017/decorative" val="1"/>
@@ -8363,7 +8363,7 @@
       </p:sp>
       <p:pic>
         <p:nvPicPr>
-          <p:cNvPr id="5" name="Image 0" descr="">
+          <p:cNvPr id="5" name="Image 0">
             <a:extLst>
               <a:ext uri="{C183D7F6-B498-43B3-948B-1728B52AA6E4}">
                 <adec:decorative xmlns:adec="http://schemas.microsoft.com/office/drawing/2017/decorative" val="1"/>
@@ -8468,7 +8468,7 @@
       </p:sp>
       <p:sp>
         <p:nvSpPr>
-          <p:cNvPr id="8" name="Content card" descr="">
+          <p:cNvPr id="8" name="Content card">
             <a:extLst>
               <a:ext uri="{C183D7F6-B498-43B3-948B-1728B52AA6E4}">
                 <adec:decorative xmlns:adec="http://schemas.microsoft.com/office/drawing/2017/decorative" val="1"/>
@@ -8508,7 +8508,7 @@
       </p:sp>
       <p:sp>
         <p:nvSpPr>
-          <p:cNvPr id="9" name="Icon FaFileContract" descr="">
+          <p:cNvPr id="9" name="Icon FaFileContract">
             <a:extLst>
               <a:ext uri="{C183D7F6-B498-43B3-948B-1728B52AA6E4}">
                 <adec:decorative xmlns:adec="http://schemas.microsoft.com/office/drawing/2017/decorative" val="1"/>
@@ -8539,7 +8539,7 @@
       </p:sp>
       <p:pic>
         <p:nvPicPr>
-          <p:cNvPr id="10" name="Image 1" descr="">
+          <p:cNvPr id="10" name="Image 1">
             <a:extLst>
               <a:ext uri="{C183D7F6-B498-43B3-948B-1728B52AA6E4}">
                 <adec:decorative xmlns:adec="http://schemas.microsoft.com/office/drawing/2017/decorative" val="1"/>
@@ -8644,7 +8644,7 @@
       </p:sp>
       <p:sp>
         <p:nvSpPr>
-          <p:cNvPr id="13" name="Freshness card" descr="">
+          <p:cNvPr id="13" name="Freshness card">
             <a:extLst>
               <a:ext uri="{C183D7F6-B498-43B3-948B-1728B52AA6E4}">
                 <adec:decorative xmlns:adec="http://schemas.microsoft.com/office/drawing/2017/decorative" val="1"/>
@@ -8684,7 +8684,7 @@
       </p:sp>
       <p:sp>
         <p:nvSpPr>
-          <p:cNvPr id="14" name="Icon FaChartLine" descr="">
+          <p:cNvPr id="14" name="Icon FaChartLine">
             <a:extLst>
               <a:ext uri="{C183D7F6-B498-43B3-948B-1728B52AA6E4}">
                 <adec:decorative xmlns:adec="http://schemas.microsoft.com/office/drawing/2017/decorative" val="1"/>
@@ -8715,7 +8715,7 @@
       </p:sp>
       <p:pic>
         <p:nvPicPr>
-          <p:cNvPr id="15" name="Image 2" descr="">
+          <p:cNvPr id="15" name="Image 2">
             <a:extLst>
               <a:ext uri="{C183D7F6-B498-43B3-948B-1728B52AA6E4}">
                 <adec:decorative xmlns:adec="http://schemas.microsoft.com/office/drawing/2017/decorative" val="1"/>
@@ -8820,7 +8820,7 @@
       </p:sp>
       <p:sp>
         <p:nvSpPr>
-          <p:cNvPr id="18" name="Privacy basis card" descr="">
+          <p:cNvPr id="18" name="Privacy basis card">
             <a:extLst>
               <a:ext uri="{C183D7F6-B498-43B3-948B-1728B52AA6E4}">
                 <adec:decorative xmlns:adec="http://schemas.microsoft.com/office/drawing/2017/decorative" val="1"/>
@@ -8860,7 +8860,7 @@
       </p:sp>
       <p:sp>
         <p:nvSpPr>
-          <p:cNvPr id="19" name="Icon FaLock" descr="">
+          <p:cNvPr id="19" name="Icon FaLock">
             <a:extLst>
               <a:ext uri="{C183D7F6-B498-43B3-948B-1728B52AA6E4}">
                 <adec:decorative xmlns:adec="http://schemas.microsoft.com/office/drawing/2017/decorative" val="1"/>
@@ -8891,7 +8891,7 @@
       </p:sp>
       <p:pic>
         <p:nvPicPr>
-          <p:cNvPr id="20" name="Image 3" descr="">
+          <p:cNvPr id="20" name="Image 3">
             <a:extLst>
               <a:ext uri="{C183D7F6-B498-43B3-948B-1728B52AA6E4}">
                 <adec:decorative xmlns:adec="http://schemas.microsoft.com/office/drawing/2017/decorative" val="1"/>
@@ -8996,7 +8996,7 @@
       </p:sp>
       <p:sp>
         <p:nvSpPr>
-          <p:cNvPr id="23" name="Join on the key card" descr="">
+          <p:cNvPr id="23" name="Join on the key card">
             <a:extLst>
               <a:ext uri="{C183D7F6-B498-43B3-948B-1728B52AA6E4}">
                 <adec:decorative xmlns:adec="http://schemas.microsoft.com/office/drawing/2017/decorative" val="1"/>
@@ -9036,7 +9036,7 @@
       </p:sp>
       <p:sp>
         <p:nvSpPr>
-          <p:cNvPr id="24" name="Icon FaHashtag" descr="">
+          <p:cNvPr id="24" name="Icon FaHashtag">
             <a:extLst>
               <a:ext uri="{C183D7F6-B498-43B3-948B-1728B52AA6E4}">
                 <adec:decorative xmlns:adec="http://schemas.microsoft.com/office/drawing/2017/decorative" val="1"/>
@@ -9067,7 +9067,7 @@
       </p:sp>
       <p:pic>
         <p:nvPicPr>
-          <p:cNvPr id="25" name="Image 4" descr="">
+          <p:cNvPr id="25" name="Image 4">
             <a:extLst>
               <a:ext uri="{C183D7F6-B498-43B3-948B-1728B52AA6E4}">
                 <adec:decorative xmlns:adec="http://schemas.microsoft.com/office/drawing/2017/decorative" val="1"/>
@@ -9172,7 +9172,7 @@
       </p:sp>
       <p:sp>
         <p:nvSpPr>
-          <p:cNvPr id="28" name="Coverage card" descr="">
+          <p:cNvPr id="28" name="Coverage card">
             <a:extLst>
               <a:ext uri="{C183D7F6-B498-43B3-948B-1728B52AA6E4}">
                 <adec:decorative xmlns:adec="http://schemas.microsoft.com/office/drawing/2017/decorative" val="1"/>
@@ -9212,7 +9212,7 @@
       </p:sp>
       <p:sp>
         <p:nvSpPr>
-          <p:cNvPr id="29" name="Icon FaCircleQuestion" descr="">
+          <p:cNvPr id="29" name="Icon FaCircleQuestion">
             <a:extLst>
               <a:ext uri="{C183D7F6-B498-43B3-948B-1728B52AA6E4}">
                 <adec:decorative xmlns:adec="http://schemas.microsoft.com/office/drawing/2017/decorative" val="1"/>
@@ -9243,7 +9243,7 @@
       </p:sp>
       <p:pic>
         <p:nvPicPr>
-          <p:cNvPr id="30" name="Image 5" descr="">
+          <p:cNvPr id="30" name="Image 5">
             <a:extLst>
               <a:ext uri="{C183D7F6-B498-43B3-948B-1728B52AA6E4}">
                 <adec:decorative xmlns:adec="http://schemas.microsoft.com/office/drawing/2017/decorative" val="1"/>
@@ -9429,11 +9429,11 @@
       </p:sp>
       <p:pic>
         <p:nvPicPr>
-          <p:cNvPr id="35" name="Narration" descr="Narration for this slide; captions available" title="Narration">
+          <p:cNvPr id="35" name="Narration" descr="Narration for this slide; captions available">
             <a:hlinkClick r:id="" action="ppaction://media"/>
             <a:extLst>
               <a:ext uri="{FF2B5EF4-FFF2-40B4-BE49-F238E27FC236}">
-                <a16:creationId xmlns:a16="http://schemas.microsoft.com/office/drawing/2014/main" id="{FA651C52-D892-F318-B0D3-DA02ACBBDB9E}"/>
+                <a16:creationId xmlns:a16="http://schemas.microsoft.com/office/drawing/2014/main" id="{7E7852E2-E5DA-76E9-40B6-27E6940DE1D8}"/>
               </a:ext>
             </a:extLst>
           </p:cNvPr>
@@ -9449,7 +9449,7 @@
                     <p:ext uri="{3AFAAA56-56D3-431D-BCD4-E75A35582382}">
                       <p173:tracksInfo xmlns:p173="http://schemas.microsoft.com/office/powerpoint/2017/3/main" displayLoc="slide">
                         <p173:trackLst>
-                          <p173:track id="{0E17A055-7F9B-41C2-B527-D74F0D959C9B}" label="English (captions)" lang="en-US" r:embed="rId12"/>
+                          <p173:track id="{2BA8CBAB-6173-47B3-A74C-616C3E465597}" label="English (captions)" lang="en-US" r:embed="rId12"/>
                         </p173:trackLst>
                       </p173:tracksInfo>
                     </p:ext>
@@ -9482,10 +9482,10 @@
   </p:clrMapOvr>
   <mc:AlternateContent xmlns:mc="http://schemas.openxmlformats.org/markup-compatibility/2006">
     <mc:Choice xmlns:p14="http://schemas.microsoft.com/office/powerpoint/2010/main" Requires="p14">
-      <p:transition spd="slow" p14:dur="2000" advTm="74990"/>
+      <p:transition spd="slow" p14:dur="2000" advTm="81020"/>
     </mc:Choice>
     <mc:Fallback>
-      <p:transition spd="slow" advTm="74990"/>
+      <p:transition spd="slow" advTm="81020"/>
     </mc:Fallback>
   </mc:AlternateContent>
   <p:timing>
@@ -9519,7 +9519,7 @@
                                   <p:childTnLst>
                                     <p:cmd type="call" cmd="playFrom(0.0)">
                                       <p:cBhvr>
-                                        <p:cTn id="6" dur="73992" fill="hold"/>
+                                        <p:cTn id="6" dur="80016" fill="hold"/>
                                         <p:tgtEl>
                                           <p:spTgt spid="35"/>
                                         </p:tgtEl>
@@ -9621,7 +9621,7 @@
       </p:sp>
       <p:sp>
         <p:nvSpPr>
-          <p:cNvPr id="3" name="Now: read only card" descr="">
+          <p:cNvPr id="3" name="Now: read only card">
             <a:extLst>
               <a:ext uri="{C183D7F6-B498-43B3-948B-1728B52AA6E4}">
                 <adec:decorative xmlns:adec="http://schemas.microsoft.com/office/drawing/2017/decorative" val="1"/>
@@ -9661,7 +9661,7 @@
       </p:sp>
       <p:sp>
         <p:nvSpPr>
-          <p:cNvPr id="4" name="Icon FaListCheck" descr="">
+          <p:cNvPr id="4" name="Icon FaListCheck">
             <a:extLst>
               <a:ext uri="{C183D7F6-B498-43B3-948B-1728B52AA6E4}">
                 <adec:decorative xmlns:adec="http://schemas.microsoft.com/office/drawing/2017/decorative" val="1"/>
@@ -9692,7 +9692,7 @@
       </p:sp>
       <p:pic>
         <p:nvPicPr>
-          <p:cNvPr id="5" name="Image 0" descr="">
+          <p:cNvPr id="5" name="Image 0">
             <a:extLst>
               <a:ext uri="{C183D7F6-B498-43B3-948B-1728B52AA6E4}">
                 <adec:decorative xmlns:adec="http://schemas.microsoft.com/office/drawing/2017/decorative" val="1"/>
@@ -9837,7 +9837,7 @@
       </p:sp>
       <p:sp>
         <p:nvSpPr>
-          <p:cNvPr id="8" name="Shape 5" descr="">
+          <p:cNvPr id="8" name="Shape 5">
             <a:extLst>
               <a:ext uri="{C183D7F6-B498-43B3-948B-1728B52AA6E4}">
                 <adec:decorative xmlns:adec="http://schemas.microsoft.com/office/drawing/2017/decorative" val="1"/>
@@ -9867,7 +9867,7 @@
       </p:sp>
       <p:sp>
         <p:nvSpPr>
-          <p:cNvPr id="9" name="Before Core HCM card" descr="">
+          <p:cNvPr id="9" name="Before Core HCM card">
             <a:extLst>
               <a:ext uri="{C183D7F6-B498-43B3-948B-1728B52AA6E4}">
                 <adec:decorative xmlns:adec="http://schemas.microsoft.com/office/drawing/2017/decorative" val="1"/>
@@ -9907,7 +9907,7 @@
       </p:sp>
       <p:sp>
         <p:nvSpPr>
-          <p:cNvPr id="10" name="Icon FaUserShield" descr="">
+          <p:cNvPr id="10" name="Icon FaUserShield">
             <a:extLst>
               <a:ext uri="{C183D7F6-B498-43B3-948B-1728B52AA6E4}">
                 <adec:decorative xmlns:adec="http://schemas.microsoft.com/office/drawing/2017/decorative" val="1"/>
@@ -9938,7 +9938,7 @@
       </p:sp>
       <p:pic>
         <p:nvPicPr>
-          <p:cNvPr id="11" name="Image 1" descr="">
+          <p:cNvPr id="11" name="Image 1">
             <a:extLst>
               <a:ext uri="{C183D7F6-B498-43B3-948B-1728B52AA6E4}">
                 <adec:decorative xmlns:adec="http://schemas.microsoft.com/office/drawing/2017/decorative" val="1"/>
@@ -10083,7 +10083,7 @@
       </p:sp>
       <p:sp>
         <p:nvSpPr>
-          <p:cNvPr id="14" name="Shape 10" descr="">
+          <p:cNvPr id="14" name="Shape 10">
             <a:extLst>
               <a:ext uri="{C183D7F6-B498-43B3-948B-1728B52AA6E4}">
                 <adec:decorative xmlns:adec="http://schemas.microsoft.com/office/drawing/2017/decorative" val="1"/>
@@ -10113,7 +10113,7 @@
       </p:sp>
       <p:sp>
         <p:nvSpPr>
-          <p:cNvPr id="15" name="At Core HCM go-live card" descr="">
+          <p:cNvPr id="15" name="At Core HCM go-live card">
             <a:extLst>
               <a:ext uri="{C183D7F6-B498-43B3-948B-1728B52AA6E4}">
                 <adec:decorative xmlns:adec="http://schemas.microsoft.com/office/drawing/2017/decorative" val="1"/>
@@ -10153,7 +10153,7 @@
       </p:sp>
       <p:sp>
         <p:nvSpPr>
-          <p:cNvPr id="16" name="Icon FaRoute" descr="">
+          <p:cNvPr id="16" name="Icon FaRoute">
             <a:extLst>
               <a:ext uri="{C183D7F6-B498-43B3-948B-1728B52AA6E4}">
                 <adec:decorative xmlns:adec="http://schemas.microsoft.com/office/drawing/2017/decorative" val="1"/>
@@ -10184,7 +10184,7 @@
       </p:sp>
       <p:pic>
         <p:nvPicPr>
-          <p:cNvPr id="17" name="Image 2" descr="">
+          <p:cNvPr id="17" name="Image 2">
             <a:extLst>
               <a:ext uri="{C183D7F6-B498-43B3-948B-1728B52AA6E4}">
                 <adec:decorative xmlns:adec="http://schemas.microsoft.com/office/drawing/2017/decorative" val="1"/>
@@ -10329,7 +10329,7 @@
       </p:sp>
       <p:sp>
         <p:nvSpPr>
-          <p:cNvPr id="20" name="Ask band" descr="">
+          <p:cNvPr id="20" name="Ask band">
             <a:extLst>
               <a:ext uri="{C183D7F6-B498-43B3-948B-1728B52AA6E4}">
                 <adec:decorative xmlns:adec="http://schemas.microsoft.com/office/drawing/2017/decorative" val="1"/>
@@ -10458,11 +10458,11 @@
       </p:sp>
       <p:pic>
         <p:nvPicPr>
-          <p:cNvPr id="22" name="Narration" descr="Narration for this slide; captions available" title="Narration">
+          <p:cNvPr id="22" name="Narration" descr="Narration for this slide; captions available">
             <a:hlinkClick r:id="" action="ppaction://media"/>
             <a:extLst>
               <a:ext uri="{FF2B5EF4-FFF2-40B4-BE49-F238E27FC236}">
-                <a16:creationId xmlns:a16="http://schemas.microsoft.com/office/drawing/2014/main" id="{F4C14DE2-A551-6B6B-56CA-1DF744A7B220}"/>
+                <a16:creationId xmlns:a16="http://schemas.microsoft.com/office/drawing/2014/main" id="{97F79CD4-E174-7551-0632-349103DFCBF5}"/>
               </a:ext>
             </a:extLst>
           </p:cNvPr>
@@ -10478,7 +10478,7 @@
                     <p:ext uri="{3AFAAA56-56D3-431D-BCD4-E75A35582382}">
                       <p173:tracksInfo xmlns:p173="http://schemas.microsoft.com/office/powerpoint/2017/3/main" displayLoc="slide">
                         <p173:trackLst>
-                          <p173:track id="{0224D260-3183-4C63-A0C0-845E52042D72}" label="English (captions)" lang="en-US" r:embed="rId9"/>
+                          <p173:track id="{C4028C24-6B03-4102-82A5-1F33CB16DB90}" label="English (captions)" lang="en-US" r:embed="rId9"/>
                         </p173:trackLst>
                       </p173:tracksInfo>
                     </p:ext>

--- a/presentations/hr-driven-identity-interview/HR_Driven_Identity_Contractor_Source_AnyAgency_Narrated.pptx
+++ b/presentations/hr-driven-identity-interview/HR_Driven_Identity_Contractor_Source_AnyAgency_Narrated.pptx
@@ -170,7 +170,7 @@
     </p:spTree>
     <p:extLst>
       <p:ext uri="{BB962C8B-B14F-4D97-AF65-F5344CB8AC3E}">
-        <p14:creationId xmlns:p14="http://schemas.microsoft.com/office/powerpoint/2010/main" val="2832734823"/>
+        <p14:creationId xmlns:p14="http://schemas.microsoft.com/office/powerpoint/2010/main" val="2925010969"/>
       </p:ext>
     </p:extLst>
   </p:cSld>
@@ -1752,7 +1752,7 @@
             <a:hlinkClick r:id="" action="ppaction://media"/>
             <a:extLst>
               <a:ext uri="{FF2B5EF4-FFF2-40B4-BE49-F238E27FC236}">
-                <a16:creationId xmlns:a16="http://schemas.microsoft.com/office/drawing/2014/main" id="{F06562BE-27D5-3EA4-3A71-F3D5AD034E92}"/>
+                <a16:creationId xmlns:a16="http://schemas.microsoft.com/office/drawing/2014/main" id="{011EA29D-142A-8D09-A7EC-E964BEE907F1}"/>
               </a:ext>
             </a:extLst>
           </p:cNvPr>
@@ -1768,7 +1768,7 @@
                     <p:ext uri="{3AFAAA56-56D3-431D-BCD4-E75A35582382}">
                       <p173:tracksInfo xmlns:p173="http://schemas.microsoft.com/office/powerpoint/2017/3/main" displayLoc="slide">
                         <p173:trackLst>
-                          <p173:track id="{FFE94263-9C2E-4940-B560-056D37AE0D38}" label="English (captions)" lang="en-US" r:embed="rId6"/>
+                          <p173:track id="{8BF02BE1-AF65-4BD9-B9DA-FF2F18882C89}" label="English (captions)" lang="en-US" r:embed="rId6"/>
                         </p173:trackLst>
                       </p173:tracksInfo>
                     </p:ext>
@@ -1786,7 +1786,7 @@
         </p:blipFill>
         <p:spPr>
           <a:xfrm>
-            <a:off x="127000" y="6350000"/>
+            <a:off x="12446000" y="127000"/>
             <a:ext cx="304800" cy="304800"/>
           </a:xfrm>
           <a:prstGeom prst="rect">
@@ -1801,10 +1801,10 @@
   </p:clrMapOvr>
   <mc:AlternateContent xmlns:mc="http://schemas.openxmlformats.org/markup-compatibility/2006">
     <mc:Choice xmlns:p14="http://schemas.microsoft.com/office/powerpoint/2010/main" Requires="p14">
-      <p:transition spd="slow" p14:dur="2000" advTm="46460"/>
+      <p:transition spd="slow" p14:dur="2000" advTm="49460"/>
     </mc:Choice>
     <mc:Fallback>
-      <p:transition spd="slow" advTm="46460"/>
+      <p:transition spd="slow" advTm="49460"/>
     </mc:Fallback>
   </mc:AlternateContent>
   <p:timing>
@@ -2721,7 +2721,7 @@
             <a:hlinkClick r:id="" action="ppaction://media"/>
             <a:extLst>
               <a:ext uri="{FF2B5EF4-FFF2-40B4-BE49-F238E27FC236}">
-                <a16:creationId xmlns:a16="http://schemas.microsoft.com/office/drawing/2014/main" id="{C624C934-39AF-D1D5-0CF0-60475106D2E6}"/>
+                <a16:creationId xmlns:a16="http://schemas.microsoft.com/office/drawing/2014/main" id="{D4B5D76D-ADAB-B766-F7F9-1DA09995FC47}"/>
               </a:ext>
             </a:extLst>
           </p:cNvPr>
@@ -2737,7 +2737,7 @@
                     <p:ext uri="{3AFAAA56-56D3-431D-BCD4-E75A35582382}">
                       <p173:tracksInfo xmlns:p173="http://schemas.microsoft.com/office/powerpoint/2017/3/main" displayLoc="slide">
                         <p173:trackLst>
-                          <p173:track id="{4F48180B-6028-4517-9A23-C7A72EFD5020}" label="English (captions)" lang="en-US" r:embed="rId9"/>
+                          <p173:track id="{DFF93D0B-380E-4702-A9DE-57358DDCAF9E}" label="English (captions)" lang="en-US" r:embed="rId9"/>
                         </p173:trackLst>
                       </p173:tracksInfo>
                     </p:ext>
@@ -2755,7 +2755,7 @@
         </p:blipFill>
         <p:spPr>
           <a:xfrm>
-            <a:off x="127000" y="6350000"/>
+            <a:off x="12446000" y="127000"/>
             <a:ext cx="304800" cy="304800"/>
           </a:xfrm>
           <a:prstGeom prst="rect">
@@ -2770,10 +2770,10 @@
   </p:clrMapOvr>
   <mc:AlternateContent xmlns:mc="http://schemas.openxmlformats.org/markup-compatibility/2006">
     <mc:Choice xmlns:p14="http://schemas.microsoft.com/office/powerpoint/2010/main" Requires="p14">
-      <p:transition spd="slow" p14:dur="2000" advTm="97600"/>
+      <p:transition spd="slow" p14:dur="2000" advTm="100600"/>
     </mc:Choice>
     <mc:Fallback>
-      <p:transition spd="slow" advTm="97600"/>
+      <p:transition spd="slow" advTm="100600"/>
     </mc:Fallback>
   </mc:AlternateContent>
   <p:timing>
@@ -3927,7 +3927,7 @@
             <a:hlinkClick r:id="" action="ppaction://media"/>
             <a:extLst>
               <a:ext uri="{FF2B5EF4-FFF2-40B4-BE49-F238E27FC236}">
-                <a16:creationId xmlns:a16="http://schemas.microsoft.com/office/drawing/2014/main" id="{ED611C78-AFA8-E6BE-54E8-0A0381D6F04F}"/>
+                <a16:creationId xmlns:a16="http://schemas.microsoft.com/office/drawing/2014/main" id="{8D4925E9-96BF-2877-4D53-184981256344}"/>
               </a:ext>
             </a:extLst>
           </p:cNvPr>
@@ -3943,7 +3943,7 @@
                     <p:ext uri="{3AFAAA56-56D3-431D-BCD4-E75A35582382}">
                       <p173:tracksInfo xmlns:p173="http://schemas.microsoft.com/office/powerpoint/2017/3/main" displayLoc="slide">
                         <p173:trackLst>
-                          <p173:track id="{16C12A33-BFB4-4F56-AF8F-9081687DC59F}" label="English (captions)" lang="en-US" r:embed="rId10"/>
+                          <p173:track id="{02774353-1EA9-4000-912B-F147E25B65B0}" label="English (captions)" lang="en-US" r:embed="rId10"/>
                         </p173:trackLst>
                       </p173:tracksInfo>
                     </p:ext>
@@ -3961,7 +3961,7 @@
         </p:blipFill>
         <p:spPr>
           <a:xfrm>
-            <a:off x="127000" y="6350000"/>
+            <a:off x="12446000" y="127000"/>
             <a:ext cx="304800" cy="304800"/>
           </a:xfrm>
           <a:prstGeom prst="rect">
@@ -3976,10 +3976,10 @@
   </p:clrMapOvr>
   <mc:AlternateContent xmlns:mc="http://schemas.openxmlformats.org/markup-compatibility/2006">
     <mc:Choice xmlns:p14="http://schemas.microsoft.com/office/powerpoint/2010/main" Requires="p14">
-      <p:transition spd="slow" p14:dur="2000" advTm="95730"/>
+      <p:transition spd="slow" p14:dur="2000" advTm="98730"/>
     </mc:Choice>
     <mc:Fallback>
-      <p:transition spd="slow" advTm="95730"/>
+      <p:transition spd="slow" advTm="98730"/>
     </mc:Fallback>
   </mc:AlternateContent>
   <p:timing>
@@ -6393,7 +6393,7 @@
             <a:hlinkClick r:id="" action="ppaction://media"/>
             <a:extLst>
               <a:ext uri="{FF2B5EF4-FFF2-40B4-BE49-F238E27FC236}">
-                <a16:creationId xmlns:a16="http://schemas.microsoft.com/office/drawing/2014/main" id="{6B9E5776-4F09-857A-0808-0A6CC3DBA723}"/>
+                <a16:creationId xmlns:a16="http://schemas.microsoft.com/office/drawing/2014/main" id="{54519FB6-F39D-288B-067D-3D986143BFF8}"/>
               </a:ext>
             </a:extLst>
           </p:cNvPr>
@@ -6409,7 +6409,7 @@
                     <p:ext uri="{3AFAAA56-56D3-431D-BCD4-E75A35582382}">
                       <p173:tracksInfo xmlns:p173="http://schemas.microsoft.com/office/powerpoint/2017/3/main" displayLoc="slide">
                         <p173:trackLst>
-                          <p173:track id="{B5BDF2D8-B871-4DAF-A512-B9BC5513EBD9}" label="English (captions)" lang="en-US" r:embed="rId6"/>
+                          <p173:track id="{B3E47D15-FF51-463F-B990-E595AE40EF60}" label="English (captions)" lang="en-US" r:embed="rId6"/>
                         </p173:trackLst>
                       </p173:tracksInfo>
                     </p:ext>
@@ -6427,7 +6427,7 @@
         </p:blipFill>
         <p:spPr>
           <a:xfrm>
-            <a:off x="127000" y="6350000"/>
+            <a:off x="12446000" y="127000"/>
             <a:ext cx="304800" cy="304800"/>
           </a:xfrm>
           <a:prstGeom prst="rect">
@@ -6442,10 +6442,10 @@
   </p:clrMapOvr>
   <mc:AlternateContent xmlns:mc="http://schemas.openxmlformats.org/markup-compatibility/2006">
     <mc:Choice xmlns:p14="http://schemas.microsoft.com/office/powerpoint/2010/main" Requires="p14">
-      <p:transition spd="slow" p14:dur="2000" advTm="64860"/>
+      <p:transition spd="slow" p14:dur="2000" advTm="67860"/>
     </mc:Choice>
     <mc:Fallback>
-      <p:transition spd="slow" advTm="64860"/>
+      <p:transition spd="slow" advTm="67860"/>
     </mc:Fallback>
   </mc:AlternateContent>
   <p:timing>
@@ -8104,7 +8104,7 @@
             <a:hlinkClick r:id="" action="ppaction://media"/>
             <a:extLst>
               <a:ext uri="{FF2B5EF4-FFF2-40B4-BE49-F238E27FC236}">
-                <a16:creationId xmlns:a16="http://schemas.microsoft.com/office/drawing/2014/main" id="{64175D36-241C-F440-22A3-971D0BB6EA3F}"/>
+                <a16:creationId xmlns:a16="http://schemas.microsoft.com/office/drawing/2014/main" id="{6A398C15-3B3A-20F0-4C51-93A3062793E8}"/>
               </a:ext>
             </a:extLst>
           </p:cNvPr>
@@ -8120,7 +8120,7 @@
                     <p:ext uri="{3AFAAA56-56D3-431D-BCD4-E75A35582382}">
                       <p173:tracksInfo xmlns:p173="http://schemas.microsoft.com/office/powerpoint/2017/3/main" displayLoc="slide">
                         <p173:trackLst>
-                          <p173:track id="{B5BC4ACD-147B-49A8-BD9C-E0A1A7CFA5F2}" label="English (captions)" lang="en-US" r:embed="rId7"/>
+                          <p173:track id="{0AE3EA51-B85D-4AB3-AA7E-6713BFCBFD73}" label="English (captions)" lang="en-US" r:embed="rId7"/>
                         </p173:trackLst>
                       </p173:tracksInfo>
                     </p:ext>
@@ -8138,7 +8138,7 @@
         </p:blipFill>
         <p:spPr>
           <a:xfrm>
-            <a:off x="127000" y="6350000"/>
+            <a:off x="12446000" y="127000"/>
             <a:ext cx="304800" cy="304800"/>
           </a:xfrm>
           <a:prstGeom prst="rect">
@@ -8153,10 +8153,10 @@
   </p:clrMapOvr>
   <mc:AlternateContent xmlns:mc="http://schemas.openxmlformats.org/markup-compatibility/2006">
     <mc:Choice xmlns:p14="http://schemas.microsoft.com/office/powerpoint/2010/main" Requires="p14">
-      <p:transition spd="slow" p14:dur="2000" advTm="120540"/>
+      <p:transition spd="slow" p14:dur="2000" advTm="123540"/>
     </mc:Choice>
     <mc:Fallback>
-      <p:transition spd="slow" advTm="120540"/>
+      <p:transition spd="slow" advTm="123540"/>
     </mc:Fallback>
   </mc:AlternateContent>
   <p:timing>
@@ -9433,7 +9433,7 @@
             <a:hlinkClick r:id="" action="ppaction://media"/>
             <a:extLst>
               <a:ext uri="{FF2B5EF4-FFF2-40B4-BE49-F238E27FC236}">
-                <a16:creationId xmlns:a16="http://schemas.microsoft.com/office/drawing/2014/main" id="{7E7852E2-E5DA-76E9-40B6-27E6940DE1D8}"/>
+                <a16:creationId xmlns:a16="http://schemas.microsoft.com/office/drawing/2014/main" id="{EEB056B6-9F38-A5CE-1884-F7B925D9D2DB}"/>
               </a:ext>
             </a:extLst>
           </p:cNvPr>
@@ -9449,7 +9449,7 @@
                     <p:ext uri="{3AFAAA56-56D3-431D-BCD4-E75A35582382}">
                       <p173:tracksInfo xmlns:p173="http://schemas.microsoft.com/office/powerpoint/2017/3/main" displayLoc="slide">
                         <p173:trackLst>
-                          <p173:track id="{2BA8CBAB-6173-47B3-A74C-616C3E465597}" label="English (captions)" lang="en-US" r:embed="rId12"/>
+                          <p173:track id="{FA0896FB-5FF7-4B6C-812F-22DDADA96B77}" label="English (captions)" lang="en-US" r:embed="rId12"/>
                         </p173:trackLst>
                       </p173:tracksInfo>
                     </p:ext>
@@ -9467,7 +9467,7 @@
         </p:blipFill>
         <p:spPr>
           <a:xfrm>
-            <a:off x="127000" y="6350000"/>
+            <a:off x="12446000" y="127000"/>
             <a:ext cx="304800" cy="304800"/>
           </a:xfrm>
           <a:prstGeom prst="rect">
@@ -9482,10 +9482,10 @@
   </p:clrMapOvr>
   <mc:AlternateContent xmlns:mc="http://schemas.openxmlformats.org/markup-compatibility/2006">
     <mc:Choice xmlns:p14="http://schemas.microsoft.com/office/powerpoint/2010/main" Requires="p14">
-      <p:transition spd="slow" p14:dur="2000" advTm="81020"/>
+      <p:transition spd="slow" p14:dur="2000" advTm="84020"/>
     </mc:Choice>
     <mc:Fallback>
-      <p:transition spd="slow" advTm="81020"/>
+      <p:transition spd="slow" advTm="84020"/>
     </mc:Fallback>
   </mc:AlternateContent>
   <p:timing>
@@ -10462,7 +10462,7 @@
             <a:hlinkClick r:id="" action="ppaction://media"/>
             <a:extLst>
               <a:ext uri="{FF2B5EF4-FFF2-40B4-BE49-F238E27FC236}">
-                <a16:creationId xmlns:a16="http://schemas.microsoft.com/office/drawing/2014/main" id="{97F79CD4-E174-7551-0632-349103DFCBF5}"/>
+                <a16:creationId xmlns:a16="http://schemas.microsoft.com/office/drawing/2014/main" id="{F84CEE4C-F31D-A377-7C72-65CE19AB797B}"/>
               </a:ext>
             </a:extLst>
           </p:cNvPr>
@@ -10478,7 +10478,7 @@
                     <p:ext uri="{3AFAAA56-56D3-431D-BCD4-E75A35582382}">
                       <p173:tracksInfo xmlns:p173="http://schemas.microsoft.com/office/powerpoint/2017/3/main" displayLoc="slide">
                         <p173:trackLst>
-                          <p173:track id="{C4028C24-6B03-4102-82A5-1F33CB16DB90}" label="English (captions)" lang="en-US" r:embed="rId9"/>
+                          <p173:track id="{CBBF4496-CD99-4CFE-8592-A263BF364CC3}" label="English (captions)" lang="en-US" r:embed="rId9"/>
                         </p173:trackLst>
                       </p173:tracksInfo>
                     </p:ext>
@@ -10496,7 +10496,7 @@
         </p:blipFill>
         <p:spPr>
           <a:xfrm>
-            <a:off x="127000" y="6350000"/>
+            <a:off x="12446000" y="127000"/>
             <a:ext cx="304800" cy="304800"/>
           </a:xfrm>
           <a:prstGeom prst="rect">
@@ -10511,10 +10511,10 @@
   </p:clrMapOvr>
   <mc:AlternateContent xmlns:mc="http://schemas.openxmlformats.org/markup-compatibility/2006">
     <mc:Choice xmlns:p14="http://schemas.microsoft.com/office/powerpoint/2010/main" Requires="p14">
-      <p:transition spd="slow" p14:dur="2000" advTm="82120"/>
+      <p:transition spd="slow" p14:dur="2000" advTm="85120"/>
     </mc:Choice>
     <mc:Fallback>
-      <p:transition spd="slow" advTm="82120"/>
+      <p:transition spd="slow" advTm="85120"/>
     </mc:Fallback>
   </mc:AlternateContent>
   <p:timing>
